--- a/cnb-data/icons.pptx
+++ b/cnb-data/icons.pptx
@@ -6,14 +6,17 @@
   </p:sldMasterIdLst>
   <p:sldIdLst>
     <p:sldId id="256" r:id="rId2"/>
-    <p:sldId id="257" r:id="rId3"/>
-    <p:sldId id="258" r:id="rId4"/>
-    <p:sldId id="260" r:id="rId5"/>
-    <p:sldId id="264" r:id="rId6"/>
-    <p:sldId id="263" r:id="rId7"/>
-    <p:sldId id="262" r:id="rId8"/>
-    <p:sldId id="261" r:id="rId9"/>
-    <p:sldId id="259" r:id="rId10"/>
+    <p:sldId id="265" r:id="rId3"/>
+    <p:sldId id="266" r:id="rId4"/>
+    <p:sldId id="267" r:id="rId5"/>
+    <p:sldId id="257" r:id="rId6"/>
+    <p:sldId id="258" r:id="rId7"/>
+    <p:sldId id="260" r:id="rId8"/>
+    <p:sldId id="264" r:id="rId9"/>
+    <p:sldId id="263" r:id="rId10"/>
+    <p:sldId id="262" r:id="rId11"/>
+    <p:sldId id="261" r:id="rId12"/>
+    <p:sldId id="259" r:id="rId13"/>
   </p:sldIdLst>
   <p:sldSz cx="12192000" cy="6858000"/>
   <p:notesSz cx="6858000" cy="9144000"/>
@@ -3399,7 +3402,7 @@
 </p:sld>
 </file>
 
-<file path=ppt/slides/slide2.xml><?xml version="1.0" encoding="utf-8"?>
+<file path=ppt/slides/slide10.xml><?xml version="1.0" encoding="utf-8"?>
 <p:sld xmlns:a="http://schemas.openxmlformats.org/drawingml/2006/main" xmlns:r="http://schemas.openxmlformats.org/officeDocument/2006/relationships" xmlns:p="http://schemas.openxmlformats.org/presentationml/2006/main">
   <p:cSld>
     <p:spTree>
@@ -3416,97 +3419,30 @@
           <a:chExt cx="0" cy="0"/>
         </a:xfrm>
       </p:grpSpPr>
-      <p:pic>
-        <p:nvPicPr>
-          <p:cNvPr id="12" name="Picture 11">
-            <a:extLst>
-              <a:ext uri="{FF2B5EF4-FFF2-40B4-BE49-F238E27FC236}">
-                <a16:creationId xmlns:a16="http://schemas.microsoft.com/office/drawing/2014/main" id="{7C8E294F-A4E0-4FAE-AAED-4A763C3974B5}"/>
-              </a:ext>
-            </a:extLst>
-          </p:cNvPr>
-          <p:cNvPicPr>
-            <a:picLocks noChangeAspect="1"/>
-          </p:cNvPicPr>
+      <p:sp>
+        <p:nvSpPr>
+          <p:cNvPr id="5" name="Rectangle 4">
+            <a:extLst>
+              <a:ext uri="{FF2B5EF4-FFF2-40B4-BE49-F238E27FC236}">
+                <a16:creationId xmlns:a16="http://schemas.microsoft.com/office/drawing/2014/main" id="{EDC80090-427D-472F-B159-13E453D077AD}"/>
+              </a:ext>
+            </a:extLst>
+          </p:cNvPr>
+          <p:cNvSpPr/>
           <p:nvPr/>
-        </p:nvPicPr>
-        <p:blipFill>
-          <a:blip r:embed="rId2">
-            <a:extLst>
-              <a:ext uri="{28A0092B-C50C-407E-A947-70E740481C1C}">
-                <a14:useLocalDpi xmlns:a14="http://schemas.microsoft.com/office/drawing/2010/main" val="0"/>
-              </a:ext>
-            </a:extLst>
-          </a:blip>
-          <a:stretch>
-            <a:fillRect/>
-          </a:stretch>
-        </p:blipFill>
+        </p:nvSpPr>
         <p:spPr>
           <a:xfrm>
-            <a:off x="2573517" y="625138"/>
-            <a:ext cx="3479610" cy="3447241"/>
+            <a:off x="2150150" y="-12680"/>
+            <a:ext cx="6858000" cy="6858000"/>
           </a:xfrm>
           <a:prstGeom prst="rect">
             <a:avLst/>
           </a:prstGeom>
-        </p:spPr>
-      </p:pic>
-      <p:pic>
-        <p:nvPicPr>
-          <p:cNvPr id="13" name="Picture 12">
-            <a:extLst>
-              <a:ext uri="{FF2B5EF4-FFF2-40B4-BE49-F238E27FC236}">
-                <a16:creationId xmlns:a16="http://schemas.microsoft.com/office/drawing/2014/main" id="{6B54C6BA-6461-4495-8386-B67B9C6B90AB}"/>
-              </a:ext>
-            </a:extLst>
-          </p:cNvPr>
-          <p:cNvPicPr>
-            <a:picLocks noChangeAspect="1"/>
-          </p:cNvPicPr>
-          <p:nvPr/>
-        </p:nvPicPr>
-        <p:blipFill rotWithShape="1">
-          <a:blip r:embed="rId2">
-            <a:extLst>
-              <a:ext uri="{28A0092B-C50C-407E-A947-70E740481C1C}">
-                <a14:useLocalDpi xmlns:a14="http://schemas.microsoft.com/office/drawing/2010/main" val="0"/>
-              </a:ext>
-            </a:extLst>
-          </a:blip>
-          <a:srcRect l="18906" t="23159" r="14178" b="29806"/>
-          <a:stretch/>
-        </p:blipFill>
-        <p:spPr>
-          <a:xfrm>
-            <a:off x="6796726" y="1423447"/>
-            <a:ext cx="2328420" cy="1621411"/>
-          </a:xfrm>
-          <a:prstGeom prst="rect">
-            <a:avLst/>
-          </a:prstGeom>
-        </p:spPr>
-      </p:pic>
-      <p:sp>
-        <p:nvSpPr>
-          <p:cNvPr id="15" name="Oval 14">
-            <a:extLst>
-              <a:ext uri="{FF2B5EF4-FFF2-40B4-BE49-F238E27FC236}">
-                <a16:creationId xmlns:a16="http://schemas.microsoft.com/office/drawing/2014/main" id="{3E649217-3F20-4F9D-BB8F-D765B387CE16}"/>
-              </a:ext>
-            </a:extLst>
-          </p:cNvPr>
-          <p:cNvSpPr/>
-          <p:nvPr/>
-        </p:nvSpPr>
-        <p:spPr>
-          <a:xfrm>
-            <a:off x="7560196" y="1423447"/>
-            <a:ext cx="3291073" cy="3291073"/>
-          </a:xfrm>
-          <a:prstGeom prst="ellipse">
-            <a:avLst/>
-          </a:prstGeom>
+          <a:noFill/>
+          <a:ln>
+            <a:noFill/>
+          </a:ln>
         </p:spPr>
         <p:style>
           <a:lnRef idx="2">
@@ -3533,114 +3469,12 @@
           </a:p>
         </p:txBody>
       </p:sp>
-      <p:pic>
-        <p:nvPicPr>
-          <p:cNvPr id="16" name="Picture 15">
-            <a:extLst>
-              <a:ext uri="{FF2B5EF4-FFF2-40B4-BE49-F238E27FC236}">
-                <a16:creationId xmlns:a16="http://schemas.microsoft.com/office/drawing/2014/main" id="{E25E62B5-A0BC-4B44-BD48-B053472E5AF6}"/>
-              </a:ext>
-            </a:extLst>
-          </p:cNvPr>
-          <p:cNvPicPr>
-            <a:picLocks noChangeAspect="1"/>
-          </p:cNvPicPr>
-          <p:nvPr/>
-        </p:nvPicPr>
-        <p:blipFill>
-          <a:blip r:embed="rId2">
-            <a:extLst>
-              <a:ext uri="{28A0092B-C50C-407E-A947-70E740481C1C}">
-                <a14:useLocalDpi xmlns:a14="http://schemas.microsoft.com/office/drawing/2010/main" val="0"/>
-              </a:ext>
-            </a:extLst>
-          </a:blip>
-          <a:stretch>
-            <a:fillRect/>
-          </a:stretch>
-        </p:blipFill>
-        <p:spPr>
-          <a:xfrm>
-            <a:off x="2725917" y="777538"/>
-            <a:ext cx="3479610" cy="3447241"/>
-          </a:xfrm>
-          <a:prstGeom prst="rect">
-            <a:avLst/>
-          </a:prstGeom>
-        </p:spPr>
-      </p:pic>
-      <p:pic>
-        <p:nvPicPr>
-          <p:cNvPr id="18" name="Picture 17">
-            <a:extLst>
-              <a:ext uri="{FF2B5EF4-FFF2-40B4-BE49-F238E27FC236}">
-                <a16:creationId xmlns:a16="http://schemas.microsoft.com/office/drawing/2014/main" id="{855AAF4D-D3CA-4F00-9E47-F358B4B19207}"/>
-              </a:ext>
-            </a:extLst>
-          </p:cNvPr>
-          <p:cNvPicPr>
-            <a:picLocks noChangeAspect="1"/>
-          </p:cNvPicPr>
-          <p:nvPr/>
-        </p:nvPicPr>
-        <p:blipFill>
-          <a:blip r:embed="rId3">
-            <a:extLst>
-              <a:ext uri="{28A0092B-C50C-407E-A947-70E740481C1C}">
-                <a14:useLocalDpi xmlns:a14="http://schemas.microsoft.com/office/drawing/2010/main" val="0"/>
-              </a:ext>
-            </a:extLst>
-          </a:blip>
-          <a:stretch>
-            <a:fillRect/>
-          </a:stretch>
-        </p:blipFill>
-        <p:spPr>
-          <a:xfrm>
-            <a:off x="480668" y="1147082"/>
-            <a:ext cx="6389370" cy="4563836"/>
-          </a:xfrm>
-          <a:prstGeom prst="rect">
-            <a:avLst/>
-          </a:prstGeom>
-        </p:spPr>
-      </p:pic>
-    </p:spTree>
-    <p:extLst>
-      <p:ext uri="{BB962C8B-B14F-4D97-AF65-F5344CB8AC3E}">
-        <p14:creationId xmlns:p14="http://schemas.microsoft.com/office/powerpoint/2010/main" val="2106479747"/>
-      </p:ext>
-    </p:extLst>
-  </p:cSld>
-  <p:clrMapOvr>
-    <a:masterClrMapping/>
-  </p:clrMapOvr>
-</p:sld>
-</file>
-
-<file path=ppt/slides/slide3.xml><?xml version="1.0" encoding="utf-8"?>
-<p:sld xmlns:a="http://schemas.openxmlformats.org/drawingml/2006/main" xmlns:r="http://schemas.openxmlformats.org/officeDocument/2006/relationships" xmlns:p="http://schemas.openxmlformats.org/presentationml/2006/main">
-  <p:cSld>
-    <p:spTree>
-      <p:nvGrpSpPr>
-        <p:cNvPr id="1" name=""/>
-        <p:cNvGrpSpPr/>
-        <p:nvPr/>
-      </p:nvGrpSpPr>
-      <p:grpSpPr>
-        <a:xfrm>
-          <a:off x="0" y="0"/>
-          <a:ext cx="0" cy="0"/>
-          <a:chOff x="0" y="0"/>
-          <a:chExt cx="0" cy="0"/>
-        </a:xfrm>
-      </p:grpSpPr>
-      <p:sp>
-        <p:nvSpPr>
-          <p:cNvPr id="5" name="Rectangle 4">
-            <a:extLst>
-              <a:ext uri="{FF2B5EF4-FFF2-40B4-BE49-F238E27FC236}">
-                <a16:creationId xmlns:a16="http://schemas.microsoft.com/office/drawing/2014/main" id="{EDC80090-427D-472F-B159-13E453D077AD}"/>
+      <p:sp>
+        <p:nvSpPr>
+          <p:cNvPr id="10" name="Parallelogram 9">
+            <a:extLst>
+              <a:ext uri="{FF2B5EF4-FFF2-40B4-BE49-F238E27FC236}">
+                <a16:creationId xmlns:a16="http://schemas.microsoft.com/office/drawing/2014/main" id="{A89FDD28-6649-491E-9EFF-F3AF1EFA9C14}"/>
               </a:ext>
             </a:extLst>
           </p:cNvPr>
@@ -3649,14 +3483,14 @@
         </p:nvSpPr>
         <p:spPr>
           <a:xfrm>
-            <a:off x="2667000" y="0"/>
-            <a:ext cx="6858000" cy="6858000"/>
-          </a:xfrm>
-          <a:prstGeom prst="rect">
+            <a:off x="3029562" y="3015121"/>
+            <a:ext cx="6132876" cy="783007"/>
+          </a:xfrm>
+          <a:prstGeom prst="parallelogram">
             <a:avLst/>
           </a:prstGeom>
           <a:solidFill>
-            <a:schemeClr val="bg1"/>
+            <a:srgbClr val="4BB7BB"/>
           </a:solidFill>
           <a:ln>
             <a:noFill/>
@@ -3689,10 +3523,10 @@
       </p:sp>
       <p:grpSp>
         <p:nvGrpSpPr>
-          <p:cNvPr id="9" name="Group 8">
-            <a:extLst>
-              <a:ext uri="{FF2B5EF4-FFF2-40B4-BE49-F238E27FC236}">
-                <a16:creationId xmlns:a16="http://schemas.microsoft.com/office/drawing/2014/main" id="{6BB7E984-7DE1-47C1-B427-1B4E961CB720}"/>
+          <p:cNvPr id="2" name="Group 1">
+            <a:extLst>
+              <a:ext uri="{FF2B5EF4-FFF2-40B4-BE49-F238E27FC236}">
+                <a16:creationId xmlns:a16="http://schemas.microsoft.com/office/drawing/2014/main" id="{7A3BD6DA-2272-4F76-B7E7-16E91F5683F2}"/>
               </a:ext>
             </a:extLst>
           </p:cNvPr>
@@ -3703,7 +3537,7 @@
           <a:xfrm>
             <a:off x="4953000" y="429108"/>
             <a:ext cx="2286000" cy="2286000"/>
-            <a:chOff x="1133325" y="720723"/>
+            <a:chOff x="4953000" y="429108"/>
             <a:chExt cx="2286000" cy="2286000"/>
           </a:xfrm>
         </p:grpSpPr>
@@ -3721,20 +3555,18 @@
           </p:nvSpPr>
           <p:spPr>
             <a:xfrm>
-              <a:off x="1133325" y="720723"/>
+              <a:off x="4953000" y="429108"/>
               <a:ext cx="2286000" cy="2286000"/>
             </a:xfrm>
             <a:prstGeom prst="ellipse">
               <a:avLst/>
             </a:prstGeom>
             <a:solidFill>
-              <a:schemeClr val="bg1">
-                <a:lumMod val="95000"/>
-              </a:schemeClr>
+              <a:schemeClr val="bg1"/>
             </a:solidFill>
             <a:ln w="152400">
               <a:solidFill>
-                <a:srgbClr val="9EC840"/>
+                <a:srgbClr val="4BB7BB"/>
               </a:solidFill>
             </a:ln>
           </p:spPr>
@@ -3763,1526 +3595,126 @@
             </a:p>
           </p:txBody>
         </p:sp>
-        <p:pic>
-          <p:nvPicPr>
-            <p:cNvPr id="8" name="Picture 7">
+        <p:grpSp>
+          <p:nvGrpSpPr>
+            <p:cNvPr id="7" name="Group 6">
               <a:extLst>
                 <a:ext uri="{FF2B5EF4-FFF2-40B4-BE49-F238E27FC236}">
-                  <a16:creationId xmlns:a16="http://schemas.microsoft.com/office/drawing/2014/main" id="{AC0C1D45-2478-4AA0-A075-49FB3030CC97}"/>
+                  <a16:creationId xmlns:a16="http://schemas.microsoft.com/office/drawing/2014/main" id="{EBBFBED0-F70D-43F8-9B02-F58EC8FB9999}"/>
                 </a:ext>
               </a:extLst>
             </p:cNvPr>
-            <p:cNvPicPr>
-              <a:picLocks noChangeAspect="1"/>
-            </p:cNvPicPr>
+            <p:cNvGrpSpPr/>
             <p:nvPr/>
-          </p:nvPicPr>
-          <p:blipFill rotWithShape="1">
-            <a:blip r:embed="rId2">
-              <a:clrChange>
-                <a:clrFrom>
-                  <a:srgbClr val="FFFFFF"/>
-                </a:clrFrom>
-                <a:clrTo>
-                  <a:srgbClr val="FFFFFF">
-                    <a:alpha val="0"/>
-                  </a:srgbClr>
-                </a:clrTo>
-              </a:clrChange>
-              <a:extLst>
-                <a:ext uri="{28A0092B-C50C-407E-A947-70E740481C1C}">
-                  <a14:useLocalDpi xmlns:a14="http://schemas.microsoft.com/office/drawing/2010/main" val="0"/>
-                </a:ext>
-              </a:extLst>
-            </a:blip>
-            <a:srcRect l="18906" t="23159" r="14178" b="29806"/>
-            <a:stretch/>
-          </p:blipFill>
-          <p:spPr>
+          </p:nvGrpSpPr>
+          <p:grpSpPr>
             <a:xfrm>
-              <a:off x="1307533" y="1189098"/>
-              <a:ext cx="1937584" cy="1349250"/>
+              <a:off x="5363542" y="832976"/>
+              <a:ext cx="1485602" cy="1439905"/>
+              <a:chOff x="8048963" y="1478696"/>
+              <a:chExt cx="1152425" cy="1115682"/>
             </a:xfrm>
-            <a:prstGeom prst="rect">
-              <a:avLst/>
-            </a:prstGeom>
-          </p:spPr>
-        </p:pic>
-      </p:grpSp>
-      <p:sp>
-        <p:nvSpPr>
-          <p:cNvPr id="10" name="Parallelogram 9">
-            <a:extLst>
-              <a:ext uri="{FF2B5EF4-FFF2-40B4-BE49-F238E27FC236}">
-                <a16:creationId xmlns:a16="http://schemas.microsoft.com/office/drawing/2014/main" id="{A89FDD28-6649-491E-9EFF-F3AF1EFA9C14}"/>
-              </a:ext>
-            </a:extLst>
-          </p:cNvPr>
-          <p:cNvSpPr/>
-          <p:nvPr/>
-        </p:nvSpPr>
-        <p:spPr>
-          <a:xfrm>
-            <a:off x="3029562" y="3015121"/>
-            <a:ext cx="6132876" cy="783007"/>
-          </a:xfrm>
-          <a:prstGeom prst="parallelogram">
-            <a:avLst/>
-          </a:prstGeom>
-          <a:solidFill>
-            <a:srgbClr val="9EC840"/>
-          </a:solidFill>
-          <a:ln>
-            <a:noFill/>
-          </a:ln>
-        </p:spPr>
-        <p:style>
-          <a:lnRef idx="2">
-            <a:schemeClr val="accent1">
-              <a:shade val="50000"/>
-            </a:schemeClr>
-          </a:lnRef>
-          <a:fillRef idx="1">
-            <a:schemeClr val="accent1"/>
-          </a:fillRef>
-          <a:effectRef idx="0">
-            <a:schemeClr val="accent1"/>
-          </a:effectRef>
-          <a:fontRef idx="minor">
-            <a:schemeClr val="lt1"/>
-          </a:fontRef>
-        </p:style>
-        <p:txBody>
-          <a:bodyPr rtlCol="0" anchor="ctr"/>
-          <a:lstStyle/>
-          <a:p>
-            <a:pPr algn="ctr"/>
-            <a:endParaRPr lang="en-PH"/>
-          </a:p>
-        </p:txBody>
-      </p:sp>
-      <p:sp>
-        <p:nvSpPr>
-          <p:cNvPr id="11" name="Rectangle 10">
-            <a:extLst>
-              <a:ext uri="{FF2B5EF4-FFF2-40B4-BE49-F238E27FC236}">
-                <a16:creationId xmlns:a16="http://schemas.microsoft.com/office/drawing/2014/main" id="{7FC8E1EB-68A2-4CCA-867F-DE4DA42667FA}"/>
-              </a:ext>
-            </a:extLst>
-          </p:cNvPr>
-          <p:cNvSpPr/>
-          <p:nvPr/>
-        </p:nvSpPr>
-        <p:spPr>
-          <a:xfrm>
-            <a:off x="1023174" y="429108"/>
-            <a:ext cx="10755252" cy="923330"/>
-          </a:xfrm>
-          <a:prstGeom prst="rect">
-            <a:avLst/>
-          </a:prstGeom>
-          <a:noFill/>
-        </p:spPr>
-        <p:txBody>
-          <a:bodyPr wrap="none" lIns="91440" tIns="45720" rIns="91440" bIns="45720">
-            <a:spAutoFit/>
-          </a:bodyPr>
-          <a:lstStyle/>
-          <a:p>
-            <a:pPr algn="ctr"/>
-            <a:r>
-              <a:rPr lang="en-US" sz="5400" b="0" cap="none" spc="0" dirty="0">
-                <a:ln w="0"/>
+          </p:grpSpPr>
+          <p:pic>
+            <p:nvPicPr>
+              <p:cNvPr id="17" name="Picture 16">
+                <a:extLst>
+                  <a:ext uri="{FF2B5EF4-FFF2-40B4-BE49-F238E27FC236}">
+                    <a16:creationId xmlns:a16="http://schemas.microsoft.com/office/drawing/2014/main" id="{94004DCD-EBF8-49F9-A245-58E6F070D3CD}"/>
+                  </a:ext>
+                </a:extLst>
+              </p:cNvPr>
+              <p:cNvPicPr>
+                <a:picLocks noChangeAspect="1"/>
+              </p:cNvPicPr>
+              <p:nvPr/>
+            </p:nvPicPr>
+            <p:blipFill rotWithShape="1">
+              <a:blip r:embed="rId2">
+                <a:clrChange>
+                  <a:clrFrom>
+                    <a:srgbClr val="FFFFFF"/>
+                  </a:clrFrom>
+                  <a:clrTo>
+                    <a:srgbClr val="FFFFFF">
+                      <a:alpha val="0"/>
+                    </a:srgbClr>
+                  </a:clrTo>
+                </a:clrChange>
+                <a:extLst>
+                  <a:ext uri="{28A0092B-C50C-407E-A947-70E740481C1C}">
+                    <a14:useLocalDpi xmlns:a14="http://schemas.microsoft.com/office/drawing/2010/main" val="0"/>
+                  </a:ext>
+                </a:extLst>
+              </a:blip>
+              <a:srcRect l="42680" t="18888" r="40516" b="64924"/>
+              <a:stretch/>
+            </p:blipFill>
+            <p:spPr>
+              <a:xfrm>
+                <a:off x="8048963" y="1478696"/>
+                <a:ext cx="1152425" cy="1110154"/>
+              </a:xfrm>
+              <a:prstGeom prst="rect">
+                <a:avLst/>
+              </a:prstGeom>
+            </p:spPr>
+          </p:pic>
+          <p:sp>
+            <p:nvSpPr>
+              <p:cNvPr id="4" name="Rectangle 3">
+                <a:extLst>
+                  <a:ext uri="{FF2B5EF4-FFF2-40B4-BE49-F238E27FC236}">
+                    <a16:creationId xmlns:a16="http://schemas.microsoft.com/office/drawing/2014/main" id="{BBBE39C1-E084-4774-96F3-FB301A1F659B}"/>
+                  </a:ext>
+                </a:extLst>
+              </p:cNvPr>
+              <p:cNvSpPr/>
+              <p:nvPr/>
+            </p:nvSpPr>
+            <p:spPr>
+              <a:xfrm>
+                <a:off x="9008150" y="2430274"/>
+                <a:ext cx="193238" cy="164104"/>
+              </a:xfrm>
+              <a:prstGeom prst="rect">
+                <a:avLst/>
+              </a:prstGeom>
+              <a:solidFill>
+                <a:schemeClr val="bg1"/>
+              </a:solidFill>
+              <a:ln>
                 <a:solidFill>
                   <a:schemeClr val="bg1"/>
                 </a:solidFill>
-                <a:effectLst>
-                  <a:outerShdw blurRad="38100" dist="19050" dir="2700000" algn="tl" rotWithShape="0">
-                    <a:schemeClr val="dk1">
-                      <a:alpha val="40000"/>
-                    </a:schemeClr>
-                  </a:outerShdw>
-                </a:effectLst>
-                <a:latin typeface="Arial Black" panose="020B0A04020102020204" pitchFamily="34" charset="0"/>
-              </a:rPr>
-              <a:t>AS AN EDUCATION CENTER</a:t>
-            </a:r>
-          </a:p>
-        </p:txBody>
-      </p:sp>
-      <p:pic>
-        <p:nvPicPr>
-          <p:cNvPr id="12" name="Picture 11">
-            <a:extLst>
-              <a:ext uri="{FF2B5EF4-FFF2-40B4-BE49-F238E27FC236}">
-                <a16:creationId xmlns:a16="http://schemas.microsoft.com/office/drawing/2014/main" id="{2648AF8D-8F88-46F8-8D24-4509E047F504}"/>
-              </a:ext>
-            </a:extLst>
-          </p:cNvPr>
-          <p:cNvPicPr>
-            <a:picLocks noChangeAspect="1"/>
-          </p:cNvPicPr>
-          <p:nvPr/>
-        </p:nvPicPr>
-        <p:blipFill>
-          <a:blip r:embed="rId3"/>
-          <a:stretch>
-            <a:fillRect/>
-          </a:stretch>
-        </p:blipFill>
-        <p:spPr>
-          <a:xfrm>
-            <a:off x="3029562" y="2765135"/>
-            <a:ext cx="6132876" cy="1518036"/>
-          </a:xfrm>
-          <a:prstGeom prst="rect">
-            <a:avLst/>
-          </a:prstGeom>
-        </p:spPr>
-      </p:pic>
-      <p:sp>
-        <p:nvSpPr>
-          <p:cNvPr id="13" name="TextBox 12">
-            <a:extLst>
-              <a:ext uri="{FF2B5EF4-FFF2-40B4-BE49-F238E27FC236}">
-                <a16:creationId xmlns:a16="http://schemas.microsoft.com/office/drawing/2014/main" id="{066EC97D-4911-4D7C-B645-80A61F380F2A}"/>
-              </a:ext>
-            </a:extLst>
-          </p:cNvPr>
-          <p:cNvSpPr txBox="1"/>
-          <p:nvPr/>
-        </p:nvSpPr>
-        <p:spPr>
-          <a:xfrm>
-            <a:off x="3184002" y="3857668"/>
-            <a:ext cx="5823996" cy="2308324"/>
-          </a:xfrm>
-          <a:prstGeom prst="rect">
-            <a:avLst/>
-          </a:prstGeom>
-          <a:noFill/>
-        </p:spPr>
-        <p:txBody>
-          <a:bodyPr wrap="square" rtlCol="0">
-            <a:spAutoFit/>
-          </a:bodyPr>
-          <a:lstStyle/>
-          <a:p>
-            <a:pPr algn="ctr"/>
-            <a:r>
-              <a:rPr lang="en-PH" sz="3600" dirty="0"/>
-              <a:t>To inspire and empower every</a:t>
-            </a:r>
-          </a:p>
-          <a:p>
-            <a:pPr algn="ctr"/>
-            <a:r>
-              <a:rPr lang="en-PH" sz="3600" dirty="0"/>
-              <a:t>Filipino with the knowledge of</a:t>
-            </a:r>
-          </a:p>
-          <a:p>
-            <a:pPr algn="ctr"/>
-            <a:r>
-              <a:rPr lang="en-PH" sz="3600" dirty="0"/>
-              <a:t>the national budget through</a:t>
-            </a:r>
-          </a:p>
-          <a:p>
-            <a:pPr algn="ctr"/>
-            <a:r>
-              <a:rPr lang="en-PH" sz="3600" dirty="0"/>
-              <a:t>education.</a:t>
-            </a:r>
-          </a:p>
-        </p:txBody>
-      </p:sp>
-    </p:spTree>
-    <p:extLst>
-      <p:ext uri="{BB962C8B-B14F-4D97-AF65-F5344CB8AC3E}">
-        <p14:creationId xmlns:p14="http://schemas.microsoft.com/office/powerpoint/2010/main" val="1703452172"/>
-      </p:ext>
-    </p:extLst>
-  </p:cSld>
-  <p:clrMapOvr>
-    <a:masterClrMapping/>
-  </p:clrMapOvr>
-</p:sld>
-</file>
-
-<file path=ppt/slides/slide4.xml><?xml version="1.0" encoding="utf-8"?>
-<p:sld xmlns:a="http://schemas.openxmlformats.org/drawingml/2006/main" xmlns:r="http://schemas.openxmlformats.org/officeDocument/2006/relationships" xmlns:p="http://schemas.openxmlformats.org/presentationml/2006/main">
-  <p:cSld>
-    <p:spTree>
-      <p:nvGrpSpPr>
-        <p:cNvPr id="1" name=""/>
-        <p:cNvGrpSpPr/>
-        <p:nvPr/>
-      </p:nvGrpSpPr>
-      <p:grpSpPr>
-        <a:xfrm>
-          <a:off x="0" y="0"/>
-          <a:ext cx="0" cy="0"/>
-          <a:chOff x="0" y="0"/>
-          <a:chExt cx="0" cy="0"/>
-        </a:xfrm>
-      </p:grpSpPr>
-      <p:sp>
-        <p:nvSpPr>
-          <p:cNvPr id="5" name="Rectangle 4">
-            <a:extLst>
-              <a:ext uri="{FF2B5EF4-FFF2-40B4-BE49-F238E27FC236}">
-                <a16:creationId xmlns:a16="http://schemas.microsoft.com/office/drawing/2014/main" id="{EDC80090-427D-472F-B159-13E453D077AD}"/>
-              </a:ext>
-            </a:extLst>
-          </p:cNvPr>
-          <p:cNvSpPr/>
-          <p:nvPr/>
-        </p:nvSpPr>
-        <p:spPr>
-          <a:xfrm>
-            <a:off x="2150150" y="-12680"/>
-            <a:ext cx="6858000" cy="6858000"/>
-          </a:xfrm>
-          <a:prstGeom prst="rect">
-            <a:avLst/>
-          </a:prstGeom>
-          <a:noFill/>
-          <a:ln>
-            <a:noFill/>
-          </a:ln>
-        </p:spPr>
-        <p:style>
-          <a:lnRef idx="2">
-            <a:schemeClr val="accent1">
-              <a:shade val="50000"/>
-            </a:schemeClr>
-          </a:lnRef>
-          <a:fillRef idx="1">
-            <a:schemeClr val="accent1"/>
-          </a:fillRef>
-          <a:effectRef idx="0">
-            <a:schemeClr val="accent1"/>
-          </a:effectRef>
-          <a:fontRef idx="minor">
-            <a:schemeClr val="lt1"/>
-          </a:fontRef>
-        </p:style>
-        <p:txBody>
-          <a:bodyPr rtlCol="0" anchor="ctr"/>
-          <a:lstStyle/>
-          <a:p>
-            <a:pPr algn="ctr"/>
-            <a:endParaRPr lang="en-PH"/>
-          </a:p>
-        </p:txBody>
-      </p:sp>
-      <p:sp>
-        <p:nvSpPr>
-          <p:cNvPr id="10" name="Parallelogram 9">
-            <a:extLst>
-              <a:ext uri="{FF2B5EF4-FFF2-40B4-BE49-F238E27FC236}">
-                <a16:creationId xmlns:a16="http://schemas.microsoft.com/office/drawing/2014/main" id="{A89FDD28-6649-491E-9EFF-F3AF1EFA9C14}"/>
-              </a:ext>
-            </a:extLst>
-          </p:cNvPr>
-          <p:cNvSpPr/>
-          <p:nvPr/>
-        </p:nvSpPr>
-        <p:spPr>
-          <a:xfrm>
-            <a:off x="3029562" y="3015121"/>
-            <a:ext cx="6132876" cy="783007"/>
-          </a:xfrm>
-          <a:prstGeom prst="parallelogram">
-            <a:avLst/>
-          </a:prstGeom>
-          <a:solidFill>
-            <a:srgbClr val="9794BF"/>
-          </a:solidFill>
-          <a:ln>
-            <a:noFill/>
-          </a:ln>
-        </p:spPr>
-        <p:style>
-          <a:lnRef idx="2">
-            <a:schemeClr val="accent1">
-              <a:shade val="50000"/>
-            </a:schemeClr>
-          </a:lnRef>
-          <a:fillRef idx="1">
-            <a:schemeClr val="accent1"/>
-          </a:fillRef>
-          <a:effectRef idx="0">
-            <a:schemeClr val="accent1"/>
-          </a:effectRef>
-          <a:fontRef idx="minor">
-            <a:schemeClr val="lt1"/>
-          </a:fontRef>
-        </p:style>
-        <p:txBody>
-          <a:bodyPr rtlCol="0" anchor="ctr"/>
-          <a:lstStyle/>
-          <a:p>
-            <a:pPr algn="ctr"/>
-            <a:endParaRPr lang="en-PH"/>
-          </a:p>
-        </p:txBody>
-      </p:sp>
-      <p:sp>
-        <p:nvSpPr>
-          <p:cNvPr id="11" name="Rectangle 10">
-            <a:extLst>
-              <a:ext uri="{FF2B5EF4-FFF2-40B4-BE49-F238E27FC236}">
-                <a16:creationId xmlns:a16="http://schemas.microsoft.com/office/drawing/2014/main" id="{7FC8E1EB-68A2-4CCA-867F-DE4DA42667FA}"/>
-              </a:ext>
-            </a:extLst>
-          </p:cNvPr>
-          <p:cNvSpPr/>
-          <p:nvPr/>
-        </p:nvSpPr>
-        <p:spPr>
-          <a:xfrm>
-            <a:off x="-1120309" y="429108"/>
-            <a:ext cx="15042259" cy="923330"/>
-          </a:xfrm>
-          <a:prstGeom prst="rect">
-            <a:avLst/>
-          </a:prstGeom>
-          <a:noFill/>
-        </p:spPr>
-        <p:txBody>
-          <a:bodyPr wrap="none" lIns="91440" tIns="45720" rIns="91440" bIns="45720">
-            <a:spAutoFit/>
-          </a:bodyPr>
-          <a:lstStyle/>
-          <a:p>
-            <a:pPr algn="ctr"/>
-            <a:r>
-              <a:rPr lang="en-US" sz="5400" b="0" cap="none" spc="0" dirty="0">
-                <a:ln w="0"/>
-                <a:solidFill>
-                  <a:schemeClr val="bg1"/>
-                </a:solidFill>
-                <a:effectLst>
-                  <a:outerShdw blurRad="38100" dist="19050" dir="2700000" algn="tl" rotWithShape="0">
-                    <a:schemeClr val="dk1">
-                      <a:alpha val="40000"/>
-                    </a:schemeClr>
-                  </a:outerShdw>
-                </a:effectLst>
-                <a:latin typeface="Arial Black" panose="020B0A04020102020204" pitchFamily="34" charset="0"/>
-              </a:rPr>
-              <a:t>AS A PROJECT MANAGEMENT CENTER</a:t>
-            </a:r>
-          </a:p>
-        </p:txBody>
-      </p:sp>
-      <p:sp>
-        <p:nvSpPr>
-          <p:cNvPr id="13" name="TextBox 12">
-            <a:extLst>
-              <a:ext uri="{FF2B5EF4-FFF2-40B4-BE49-F238E27FC236}">
-                <a16:creationId xmlns:a16="http://schemas.microsoft.com/office/drawing/2014/main" id="{066EC97D-4911-4D7C-B645-80A61F380F2A}"/>
-              </a:ext>
-            </a:extLst>
-          </p:cNvPr>
-          <p:cNvSpPr txBox="1"/>
-          <p:nvPr/>
-        </p:nvSpPr>
-        <p:spPr>
-          <a:xfrm>
-            <a:off x="2858826" y="3776983"/>
-            <a:ext cx="6474348" cy="3970318"/>
-          </a:xfrm>
-          <a:prstGeom prst="rect">
-            <a:avLst/>
-          </a:prstGeom>
-          <a:noFill/>
-        </p:spPr>
-        <p:txBody>
-          <a:bodyPr wrap="square" rtlCol="0">
-            <a:spAutoFit/>
-          </a:bodyPr>
-          <a:lstStyle/>
-          <a:p>
-            <a:pPr algn="ctr"/>
-            <a:r>
-              <a:rPr lang="en-PH" sz="3600" dirty="0"/>
-              <a:t>The CNB lends its technical expertise to national government offices in the preparation and improving project proposals. CNB also assists legislators in the analysis and scrutiny of the general appropriations bill.</a:t>
-            </a:r>
-          </a:p>
-        </p:txBody>
-      </p:sp>
-      <p:sp>
-        <p:nvSpPr>
-          <p:cNvPr id="6" name="Oval 5">
-            <a:extLst>
-              <a:ext uri="{FF2B5EF4-FFF2-40B4-BE49-F238E27FC236}">
-                <a16:creationId xmlns:a16="http://schemas.microsoft.com/office/drawing/2014/main" id="{B1AE4BB8-C265-4E9C-ABC7-44010C5E6FB2}"/>
-              </a:ext>
-            </a:extLst>
-          </p:cNvPr>
-          <p:cNvSpPr/>
-          <p:nvPr/>
-        </p:nvSpPr>
-        <p:spPr>
-          <a:xfrm>
-            <a:off x="4953000" y="429108"/>
-            <a:ext cx="2286000" cy="2286000"/>
-          </a:xfrm>
-          <a:prstGeom prst="ellipse">
-            <a:avLst/>
-          </a:prstGeom>
-          <a:solidFill>
-            <a:schemeClr val="bg1"/>
-          </a:solidFill>
-          <a:ln w="152400">
-            <a:solidFill>
-              <a:srgbClr val="9794BF"/>
-            </a:solidFill>
-          </a:ln>
-        </p:spPr>
-        <p:style>
-          <a:lnRef idx="2">
-            <a:schemeClr val="accent1">
-              <a:shade val="50000"/>
-            </a:schemeClr>
-          </a:lnRef>
-          <a:fillRef idx="1">
-            <a:schemeClr val="accent1"/>
-          </a:fillRef>
-          <a:effectRef idx="0">
-            <a:schemeClr val="accent1"/>
-          </a:effectRef>
-          <a:fontRef idx="minor">
-            <a:schemeClr val="lt1"/>
-          </a:fontRef>
-        </p:style>
-        <p:txBody>
-          <a:bodyPr rtlCol="0" anchor="ctr"/>
-          <a:lstStyle/>
-          <a:p>
-            <a:pPr algn="ctr"/>
-            <a:endParaRPr lang="en-PH"/>
-          </a:p>
-        </p:txBody>
-      </p:sp>
-      <p:pic>
-        <p:nvPicPr>
-          <p:cNvPr id="22" name="Picture 21">
-            <a:extLst>
-              <a:ext uri="{FF2B5EF4-FFF2-40B4-BE49-F238E27FC236}">
-                <a16:creationId xmlns:a16="http://schemas.microsoft.com/office/drawing/2014/main" id="{9DF4CF1B-E2E6-4F36-A42D-D976EABADBE2}"/>
-              </a:ext>
-            </a:extLst>
-          </p:cNvPr>
-          <p:cNvPicPr>
-            <a:picLocks noChangeAspect="1"/>
-          </p:cNvPicPr>
-          <p:nvPr/>
-        </p:nvPicPr>
-        <p:blipFill rotWithShape="1">
-          <a:blip r:embed="rId2">
-            <a:extLst>
-              <a:ext uri="{28A0092B-C50C-407E-A947-70E740481C1C}">
-                <a14:useLocalDpi xmlns:a14="http://schemas.microsoft.com/office/drawing/2010/main" val="0"/>
-              </a:ext>
-            </a:extLst>
-          </a:blip>
-          <a:srcRect l="798" t="41150" r="85638" b="46626"/>
-          <a:stretch/>
-        </p:blipFill>
-        <p:spPr>
-          <a:xfrm>
-            <a:off x="983909" y="1632088"/>
-            <a:ext cx="1682434" cy="1083020"/>
-          </a:xfrm>
-          <a:prstGeom prst="rect">
-            <a:avLst/>
-          </a:prstGeom>
-        </p:spPr>
-      </p:pic>
-      <p:pic>
-        <p:nvPicPr>
-          <p:cNvPr id="23" name="Picture 22">
-            <a:extLst>
-              <a:ext uri="{FF2B5EF4-FFF2-40B4-BE49-F238E27FC236}">
-                <a16:creationId xmlns:a16="http://schemas.microsoft.com/office/drawing/2014/main" id="{4B6EF4E1-7497-4C3A-8241-D0BB4F5A8310}"/>
-              </a:ext>
-            </a:extLst>
-          </p:cNvPr>
-          <p:cNvPicPr>
-            <a:picLocks noChangeAspect="1"/>
-          </p:cNvPicPr>
-          <p:nvPr/>
-        </p:nvPicPr>
-        <p:blipFill>
-          <a:blip r:embed="rId3"/>
-          <a:stretch>
-            <a:fillRect/>
-          </a:stretch>
-        </p:blipFill>
-        <p:spPr>
-          <a:xfrm>
-            <a:off x="4356251" y="2715108"/>
-            <a:ext cx="8131342" cy="1184475"/>
-          </a:xfrm>
-          <a:prstGeom prst="rect">
-            <a:avLst/>
-          </a:prstGeom>
-        </p:spPr>
-      </p:pic>
-      <p:pic>
-        <p:nvPicPr>
-          <p:cNvPr id="24" name="Picture 23">
-            <a:extLst>
-              <a:ext uri="{FF2B5EF4-FFF2-40B4-BE49-F238E27FC236}">
-                <a16:creationId xmlns:a16="http://schemas.microsoft.com/office/drawing/2014/main" id="{20DE1413-A1E8-413D-8053-FCE94B3300B3}"/>
-              </a:ext>
-            </a:extLst>
-          </p:cNvPr>
-          <p:cNvPicPr>
-            <a:picLocks noChangeAspect="1"/>
-          </p:cNvPicPr>
-          <p:nvPr/>
-        </p:nvPicPr>
-        <p:blipFill>
-          <a:blip r:embed="rId4"/>
-          <a:stretch>
-            <a:fillRect/>
-          </a:stretch>
-        </p:blipFill>
-        <p:spPr>
-          <a:xfrm>
-            <a:off x="2669751" y="1298263"/>
-            <a:ext cx="6852498" cy="4261473"/>
-          </a:xfrm>
-          <a:prstGeom prst="rect">
-            <a:avLst/>
-          </a:prstGeom>
-        </p:spPr>
-      </p:pic>
-    </p:spTree>
-    <p:extLst>
-      <p:ext uri="{BB962C8B-B14F-4D97-AF65-F5344CB8AC3E}">
-        <p14:creationId xmlns:p14="http://schemas.microsoft.com/office/powerpoint/2010/main" val="3085513472"/>
-      </p:ext>
-    </p:extLst>
-  </p:cSld>
-  <p:clrMapOvr>
-    <a:masterClrMapping/>
-  </p:clrMapOvr>
-</p:sld>
-</file>
-
-<file path=ppt/slides/slide5.xml><?xml version="1.0" encoding="utf-8"?>
-<p:sld xmlns:a="http://schemas.openxmlformats.org/drawingml/2006/main" xmlns:r="http://schemas.openxmlformats.org/officeDocument/2006/relationships" xmlns:p="http://schemas.openxmlformats.org/presentationml/2006/main">
-  <p:cSld>
-    <p:spTree>
-      <p:nvGrpSpPr>
-        <p:cNvPr id="1" name=""/>
-        <p:cNvGrpSpPr/>
-        <p:nvPr/>
-      </p:nvGrpSpPr>
-      <p:grpSpPr>
-        <a:xfrm>
-          <a:off x="0" y="0"/>
-          <a:ext cx="0" cy="0"/>
-          <a:chOff x="0" y="0"/>
-          <a:chExt cx="0" cy="0"/>
-        </a:xfrm>
-      </p:grpSpPr>
-      <p:sp>
-        <p:nvSpPr>
-          <p:cNvPr id="5" name="Rectangle 4">
-            <a:extLst>
-              <a:ext uri="{FF2B5EF4-FFF2-40B4-BE49-F238E27FC236}">
-                <a16:creationId xmlns:a16="http://schemas.microsoft.com/office/drawing/2014/main" id="{EDC80090-427D-472F-B159-13E453D077AD}"/>
-              </a:ext>
-            </a:extLst>
-          </p:cNvPr>
-          <p:cNvSpPr/>
-          <p:nvPr/>
-        </p:nvSpPr>
-        <p:spPr>
-          <a:xfrm>
-            <a:off x="2667000" y="0"/>
-            <a:ext cx="6858000" cy="6858000"/>
-          </a:xfrm>
-          <a:prstGeom prst="rect">
-            <a:avLst/>
-          </a:prstGeom>
-          <a:noFill/>
-          <a:ln>
-            <a:noFill/>
-          </a:ln>
-        </p:spPr>
-        <p:style>
-          <a:lnRef idx="2">
-            <a:schemeClr val="accent1">
-              <a:shade val="50000"/>
-            </a:schemeClr>
-          </a:lnRef>
-          <a:fillRef idx="1">
-            <a:schemeClr val="accent1"/>
-          </a:fillRef>
-          <a:effectRef idx="0">
-            <a:schemeClr val="accent1"/>
-          </a:effectRef>
-          <a:fontRef idx="minor">
-            <a:schemeClr val="lt1"/>
-          </a:fontRef>
-        </p:style>
-        <p:txBody>
-          <a:bodyPr rtlCol="0" anchor="ctr"/>
-          <a:lstStyle/>
-          <a:p>
-            <a:pPr algn="ctr"/>
-            <a:endParaRPr lang="en-PH"/>
-          </a:p>
-        </p:txBody>
-      </p:sp>
-      <p:sp>
-        <p:nvSpPr>
-          <p:cNvPr id="10" name="Parallelogram 9">
-            <a:extLst>
-              <a:ext uri="{FF2B5EF4-FFF2-40B4-BE49-F238E27FC236}">
-                <a16:creationId xmlns:a16="http://schemas.microsoft.com/office/drawing/2014/main" id="{A89FDD28-6649-491E-9EFF-F3AF1EFA9C14}"/>
-              </a:ext>
-            </a:extLst>
-          </p:cNvPr>
-          <p:cNvSpPr/>
-          <p:nvPr/>
-        </p:nvSpPr>
-        <p:spPr>
-          <a:xfrm>
-            <a:off x="3029562" y="3015121"/>
-            <a:ext cx="6132876" cy="783007"/>
-          </a:xfrm>
-          <a:prstGeom prst="parallelogram">
-            <a:avLst/>
-          </a:prstGeom>
-          <a:solidFill>
-            <a:srgbClr val="9794BF"/>
-          </a:solidFill>
-          <a:ln>
-            <a:noFill/>
-          </a:ln>
-        </p:spPr>
-        <p:style>
-          <a:lnRef idx="2">
-            <a:schemeClr val="accent1">
-              <a:shade val="50000"/>
-            </a:schemeClr>
-          </a:lnRef>
-          <a:fillRef idx="1">
-            <a:schemeClr val="accent1"/>
-          </a:fillRef>
-          <a:effectRef idx="0">
-            <a:schemeClr val="accent1"/>
-          </a:effectRef>
-          <a:fontRef idx="minor">
-            <a:schemeClr val="lt1"/>
-          </a:fontRef>
-        </p:style>
-        <p:txBody>
-          <a:bodyPr rtlCol="0" anchor="ctr"/>
-          <a:lstStyle/>
-          <a:p>
-            <a:pPr algn="ctr"/>
-            <a:endParaRPr lang="en-PH"/>
-          </a:p>
-        </p:txBody>
-      </p:sp>
-      <p:sp>
-        <p:nvSpPr>
-          <p:cNvPr id="6" name="Oval 5">
-            <a:extLst>
-              <a:ext uri="{FF2B5EF4-FFF2-40B4-BE49-F238E27FC236}">
-                <a16:creationId xmlns:a16="http://schemas.microsoft.com/office/drawing/2014/main" id="{B1AE4BB8-C265-4E9C-ABC7-44010C5E6FB2}"/>
-              </a:ext>
-            </a:extLst>
-          </p:cNvPr>
-          <p:cNvSpPr/>
-          <p:nvPr/>
-        </p:nvSpPr>
-        <p:spPr>
-          <a:xfrm>
-            <a:off x="4953000" y="429108"/>
-            <a:ext cx="2286000" cy="2286000"/>
-          </a:xfrm>
-          <a:prstGeom prst="ellipse">
-            <a:avLst/>
-          </a:prstGeom>
-          <a:solidFill>
-            <a:schemeClr val="bg1"/>
-          </a:solidFill>
-          <a:ln w="152400">
-            <a:solidFill>
-              <a:schemeClr val="bg1"/>
-            </a:solidFill>
-          </a:ln>
-        </p:spPr>
-        <p:style>
-          <a:lnRef idx="2">
-            <a:schemeClr val="accent1">
-              <a:shade val="50000"/>
-            </a:schemeClr>
-          </a:lnRef>
-          <a:fillRef idx="1">
-            <a:schemeClr val="accent1"/>
-          </a:fillRef>
-          <a:effectRef idx="0">
-            <a:schemeClr val="accent1"/>
-          </a:effectRef>
-          <a:fontRef idx="minor">
-            <a:schemeClr val="lt1"/>
-          </a:fontRef>
-        </p:style>
-        <p:txBody>
-          <a:bodyPr rtlCol="0" anchor="ctr"/>
-          <a:lstStyle/>
-          <a:p>
-            <a:pPr algn="ctr"/>
-            <a:endParaRPr lang="en-PH"/>
-          </a:p>
-        </p:txBody>
-      </p:sp>
-      <p:pic>
-        <p:nvPicPr>
-          <p:cNvPr id="23" name="Picture 22">
-            <a:extLst>
-              <a:ext uri="{FF2B5EF4-FFF2-40B4-BE49-F238E27FC236}">
-                <a16:creationId xmlns:a16="http://schemas.microsoft.com/office/drawing/2014/main" id="{4B6EF4E1-7497-4C3A-8241-D0BB4F5A8310}"/>
-              </a:ext>
-            </a:extLst>
-          </p:cNvPr>
-          <p:cNvPicPr>
-            <a:picLocks noChangeAspect="1"/>
-          </p:cNvPicPr>
-          <p:nvPr/>
-        </p:nvPicPr>
-        <p:blipFill>
-          <a:blip r:embed="rId2"/>
-          <a:stretch>
-            <a:fillRect/>
-          </a:stretch>
-        </p:blipFill>
-        <p:spPr>
-          <a:xfrm>
-            <a:off x="3106706" y="2928202"/>
-            <a:ext cx="5978588" cy="1184475"/>
-          </a:xfrm>
-          <a:prstGeom prst="rect">
-            <a:avLst/>
-          </a:prstGeom>
-        </p:spPr>
-      </p:pic>
-      <p:pic>
-        <p:nvPicPr>
-          <p:cNvPr id="24" name="Picture 23">
-            <a:extLst>
-              <a:ext uri="{FF2B5EF4-FFF2-40B4-BE49-F238E27FC236}">
-                <a16:creationId xmlns:a16="http://schemas.microsoft.com/office/drawing/2014/main" id="{20DE1413-A1E8-413D-8053-FCE94B3300B3}"/>
-              </a:ext>
-            </a:extLst>
-          </p:cNvPr>
-          <p:cNvPicPr>
-            <a:picLocks noChangeAspect="1"/>
-          </p:cNvPicPr>
-          <p:nvPr/>
-        </p:nvPicPr>
-        <p:blipFill>
-          <a:blip r:embed="rId3"/>
-          <a:stretch>
-            <a:fillRect/>
-          </a:stretch>
-        </p:blipFill>
-        <p:spPr>
-          <a:xfrm>
-            <a:off x="3068245" y="3692630"/>
-            <a:ext cx="6017049" cy="3239609"/>
-          </a:xfrm>
-          <a:prstGeom prst="rect">
-            <a:avLst/>
-          </a:prstGeom>
-        </p:spPr>
-      </p:pic>
-      <p:pic>
-        <p:nvPicPr>
-          <p:cNvPr id="7" name="Picture 6">
-            <a:extLst>
-              <a:ext uri="{FF2B5EF4-FFF2-40B4-BE49-F238E27FC236}">
-                <a16:creationId xmlns:a16="http://schemas.microsoft.com/office/drawing/2014/main" id="{60EA04C4-24B9-452A-AADE-3AB8E9175331}"/>
-              </a:ext>
-            </a:extLst>
-          </p:cNvPr>
-          <p:cNvPicPr>
-            <a:picLocks noChangeAspect="1"/>
-          </p:cNvPicPr>
-          <p:nvPr/>
-        </p:nvPicPr>
-        <p:blipFill>
-          <a:blip r:embed="rId4"/>
-          <a:stretch>
-            <a:fillRect/>
-          </a:stretch>
-        </p:blipFill>
-        <p:spPr>
-          <a:xfrm>
-            <a:off x="5113105" y="649759"/>
-            <a:ext cx="2057025" cy="1755726"/>
-          </a:xfrm>
-          <a:prstGeom prst="rect">
-            <a:avLst/>
-          </a:prstGeom>
-        </p:spPr>
-      </p:pic>
-      <p:sp>
-        <p:nvSpPr>
-          <p:cNvPr id="17" name="Oval 16">
-            <a:extLst>
-              <a:ext uri="{FF2B5EF4-FFF2-40B4-BE49-F238E27FC236}">
-                <a16:creationId xmlns:a16="http://schemas.microsoft.com/office/drawing/2014/main" id="{2198EB09-96A6-4D98-AC4D-A8EAB37A557C}"/>
-              </a:ext>
-            </a:extLst>
-          </p:cNvPr>
-          <p:cNvSpPr/>
-          <p:nvPr/>
-        </p:nvSpPr>
-        <p:spPr>
-          <a:xfrm>
-            <a:off x="4953000" y="384622"/>
-            <a:ext cx="2286000" cy="2286000"/>
-          </a:xfrm>
-          <a:prstGeom prst="ellipse">
-            <a:avLst/>
-          </a:prstGeom>
-          <a:noFill/>
-          <a:ln w="152400">
-            <a:solidFill>
-              <a:srgbClr val="9794BF"/>
-            </a:solidFill>
-          </a:ln>
-        </p:spPr>
-        <p:style>
-          <a:lnRef idx="2">
-            <a:schemeClr val="accent1">
-              <a:shade val="50000"/>
-            </a:schemeClr>
-          </a:lnRef>
-          <a:fillRef idx="1">
-            <a:schemeClr val="accent1"/>
-          </a:fillRef>
-          <a:effectRef idx="0">
-            <a:schemeClr val="accent1"/>
-          </a:effectRef>
-          <a:fontRef idx="minor">
-            <a:schemeClr val="lt1"/>
-          </a:fontRef>
-        </p:style>
-        <p:txBody>
-          <a:bodyPr rtlCol="0" anchor="ctr"/>
-          <a:lstStyle/>
-          <a:p>
-            <a:pPr algn="ctr"/>
-            <a:endParaRPr lang="en-PH"/>
-          </a:p>
-        </p:txBody>
-      </p:sp>
-    </p:spTree>
-    <p:extLst>
-      <p:ext uri="{BB962C8B-B14F-4D97-AF65-F5344CB8AC3E}">
-        <p14:creationId xmlns:p14="http://schemas.microsoft.com/office/powerpoint/2010/main" val="4093653896"/>
-      </p:ext>
-    </p:extLst>
-  </p:cSld>
-  <p:clrMapOvr>
-    <a:masterClrMapping/>
-  </p:clrMapOvr>
-</p:sld>
-</file>
-
-<file path=ppt/slides/slide6.xml><?xml version="1.0" encoding="utf-8"?>
-<p:sld xmlns:a="http://schemas.openxmlformats.org/drawingml/2006/main" xmlns:r="http://schemas.openxmlformats.org/officeDocument/2006/relationships" xmlns:p="http://schemas.openxmlformats.org/presentationml/2006/main">
-  <p:cSld>
-    <p:spTree>
-      <p:nvGrpSpPr>
-        <p:cNvPr id="1" name=""/>
-        <p:cNvGrpSpPr/>
-        <p:nvPr/>
-      </p:nvGrpSpPr>
-      <p:grpSpPr>
-        <a:xfrm>
-          <a:off x="0" y="0"/>
-          <a:ext cx="0" cy="0"/>
-          <a:chOff x="0" y="0"/>
-          <a:chExt cx="0" cy="0"/>
-        </a:xfrm>
-      </p:grpSpPr>
-      <p:sp>
-        <p:nvSpPr>
-          <p:cNvPr id="5" name="Rectangle 4">
-            <a:extLst>
-              <a:ext uri="{FF2B5EF4-FFF2-40B4-BE49-F238E27FC236}">
-                <a16:creationId xmlns:a16="http://schemas.microsoft.com/office/drawing/2014/main" id="{EDC80090-427D-472F-B159-13E453D077AD}"/>
-              </a:ext>
-            </a:extLst>
-          </p:cNvPr>
-          <p:cNvSpPr/>
-          <p:nvPr/>
-        </p:nvSpPr>
-        <p:spPr>
-          <a:xfrm>
-            <a:off x="2667000" y="-22376"/>
-            <a:ext cx="6858000" cy="6858000"/>
-          </a:xfrm>
-          <a:prstGeom prst="rect">
-            <a:avLst/>
-          </a:prstGeom>
-          <a:noFill/>
-          <a:ln>
-            <a:noFill/>
-          </a:ln>
-        </p:spPr>
-        <p:style>
-          <a:lnRef idx="2">
-            <a:schemeClr val="accent1">
-              <a:shade val="50000"/>
-            </a:schemeClr>
-          </a:lnRef>
-          <a:fillRef idx="1">
-            <a:schemeClr val="accent1"/>
-          </a:fillRef>
-          <a:effectRef idx="0">
-            <a:schemeClr val="accent1"/>
-          </a:effectRef>
-          <a:fontRef idx="minor">
-            <a:schemeClr val="lt1"/>
-          </a:fontRef>
-        </p:style>
-        <p:txBody>
-          <a:bodyPr rtlCol="0" anchor="ctr"/>
-          <a:lstStyle/>
-          <a:p>
-            <a:pPr algn="ctr"/>
-            <a:endParaRPr lang="en-PH"/>
-          </a:p>
-        </p:txBody>
-      </p:sp>
-      <p:sp>
-        <p:nvSpPr>
-          <p:cNvPr id="10" name="Parallelogram 9">
-            <a:extLst>
-              <a:ext uri="{FF2B5EF4-FFF2-40B4-BE49-F238E27FC236}">
-                <a16:creationId xmlns:a16="http://schemas.microsoft.com/office/drawing/2014/main" id="{A89FDD28-6649-491E-9EFF-F3AF1EFA9C14}"/>
-              </a:ext>
-            </a:extLst>
-          </p:cNvPr>
-          <p:cNvSpPr/>
-          <p:nvPr/>
-        </p:nvSpPr>
-        <p:spPr>
-          <a:xfrm>
-            <a:off x="3029562" y="3015121"/>
-            <a:ext cx="6132876" cy="783007"/>
-          </a:xfrm>
-          <a:prstGeom prst="parallelogram">
-            <a:avLst/>
-          </a:prstGeom>
-          <a:solidFill>
-            <a:srgbClr val="F79530"/>
-          </a:solidFill>
-          <a:ln>
-            <a:noFill/>
-          </a:ln>
-        </p:spPr>
-        <p:style>
-          <a:lnRef idx="2">
-            <a:schemeClr val="accent1">
-              <a:shade val="50000"/>
-            </a:schemeClr>
-          </a:lnRef>
-          <a:fillRef idx="1">
-            <a:schemeClr val="accent1"/>
-          </a:fillRef>
-          <a:effectRef idx="0">
-            <a:schemeClr val="accent1"/>
-          </a:effectRef>
-          <a:fontRef idx="minor">
-            <a:schemeClr val="lt1"/>
-          </a:fontRef>
-        </p:style>
-        <p:txBody>
-          <a:bodyPr rtlCol="0" anchor="ctr"/>
-          <a:lstStyle/>
-          <a:p>
-            <a:pPr algn="ctr"/>
-            <a:endParaRPr lang="en-PH"/>
-          </a:p>
-        </p:txBody>
-      </p:sp>
-      <p:sp>
-        <p:nvSpPr>
-          <p:cNvPr id="13" name="TextBox 12">
-            <a:extLst>
-              <a:ext uri="{FF2B5EF4-FFF2-40B4-BE49-F238E27FC236}">
-                <a16:creationId xmlns:a16="http://schemas.microsoft.com/office/drawing/2014/main" id="{066EC97D-4911-4D7C-B645-80A61F380F2A}"/>
-              </a:ext>
-            </a:extLst>
-          </p:cNvPr>
-          <p:cNvSpPr txBox="1"/>
-          <p:nvPr/>
-        </p:nvSpPr>
-        <p:spPr>
-          <a:xfrm>
-            <a:off x="2858826" y="3776983"/>
-            <a:ext cx="6474348" cy="1754326"/>
-          </a:xfrm>
-          <a:prstGeom prst="rect">
-            <a:avLst/>
-          </a:prstGeom>
-          <a:noFill/>
-        </p:spPr>
-        <p:txBody>
-          <a:bodyPr wrap="square" rtlCol="0">
-            <a:spAutoFit/>
-          </a:bodyPr>
-          <a:lstStyle/>
-          <a:p>
-            <a:pPr algn="ctr"/>
-            <a:r>
-              <a:rPr lang="en-PH" sz="3600" dirty="0"/>
-              <a:t>CNB produces books and periodicals as well as briefing materials</a:t>
-            </a:r>
-          </a:p>
-        </p:txBody>
-      </p:sp>
-      <p:sp>
-        <p:nvSpPr>
-          <p:cNvPr id="6" name="Oval 5">
-            <a:extLst>
-              <a:ext uri="{FF2B5EF4-FFF2-40B4-BE49-F238E27FC236}">
-                <a16:creationId xmlns:a16="http://schemas.microsoft.com/office/drawing/2014/main" id="{B1AE4BB8-C265-4E9C-ABC7-44010C5E6FB2}"/>
-              </a:ext>
-            </a:extLst>
-          </p:cNvPr>
-          <p:cNvSpPr/>
-          <p:nvPr/>
-        </p:nvSpPr>
-        <p:spPr>
-          <a:xfrm>
-            <a:off x="4953000" y="429108"/>
-            <a:ext cx="2286000" cy="2286000"/>
-          </a:xfrm>
-          <a:prstGeom prst="ellipse">
-            <a:avLst/>
-          </a:prstGeom>
-          <a:solidFill>
-            <a:schemeClr val="bg1"/>
-          </a:solidFill>
-          <a:ln w="152400">
-            <a:solidFill>
-              <a:srgbClr val="F79530"/>
-            </a:solidFill>
-          </a:ln>
-        </p:spPr>
-        <p:style>
-          <a:lnRef idx="2">
-            <a:schemeClr val="accent1">
-              <a:shade val="50000"/>
-            </a:schemeClr>
-          </a:lnRef>
-          <a:fillRef idx="1">
-            <a:schemeClr val="accent1"/>
-          </a:fillRef>
-          <a:effectRef idx="0">
-            <a:schemeClr val="accent1"/>
-          </a:effectRef>
-          <a:fontRef idx="minor">
-            <a:schemeClr val="lt1"/>
-          </a:fontRef>
-        </p:style>
-        <p:txBody>
-          <a:bodyPr rtlCol="0" anchor="ctr"/>
-          <a:lstStyle/>
-          <a:p>
-            <a:pPr algn="ctr"/>
-            <a:endParaRPr lang="en-PH"/>
-          </a:p>
-        </p:txBody>
-      </p:sp>
-      <p:pic>
-        <p:nvPicPr>
-          <p:cNvPr id="20" name="Picture 19">
-            <a:extLst>
-              <a:ext uri="{FF2B5EF4-FFF2-40B4-BE49-F238E27FC236}">
-                <a16:creationId xmlns:a16="http://schemas.microsoft.com/office/drawing/2014/main" id="{EEB3DD4C-7F1E-416F-8870-71F1EEDD8092}"/>
-              </a:ext>
-            </a:extLst>
-          </p:cNvPr>
-          <p:cNvPicPr>
-            <a:picLocks noChangeAspect="1"/>
-          </p:cNvPicPr>
-          <p:nvPr/>
-        </p:nvPicPr>
-        <p:blipFill rotWithShape="1">
-          <a:blip r:embed="rId2">
-            <a:extLst>
-              <a:ext uri="{28A0092B-C50C-407E-A947-70E740481C1C}">
-                <a14:useLocalDpi xmlns:a14="http://schemas.microsoft.com/office/drawing/2010/main" val="0"/>
-              </a:ext>
-            </a:extLst>
-          </a:blip>
-          <a:srcRect l="39791" t="16889" r="39987" b="62337"/>
-          <a:stretch/>
-        </p:blipFill>
-        <p:spPr>
-          <a:xfrm>
-            <a:off x="5402580" y="919600"/>
-            <a:ext cx="1386840" cy="1424646"/>
-          </a:xfrm>
-          <a:prstGeom prst="rect">
-            <a:avLst/>
-          </a:prstGeom>
-        </p:spPr>
-      </p:pic>
-      <p:pic>
-        <p:nvPicPr>
-          <p:cNvPr id="21" name="Picture 20">
-            <a:extLst>
-              <a:ext uri="{FF2B5EF4-FFF2-40B4-BE49-F238E27FC236}">
-                <a16:creationId xmlns:a16="http://schemas.microsoft.com/office/drawing/2014/main" id="{077AD583-9F8B-473E-BA4E-EC09066F92A2}"/>
-              </a:ext>
-            </a:extLst>
-          </p:cNvPr>
-          <p:cNvPicPr>
-            <a:picLocks noChangeAspect="1"/>
-          </p:cNvPicPr>
-          <p:nvPr/>
-        </p:nvPicPr>
-        <p:blipFill>
-          <a:blip r:embed="rId3"/>
-          <a:stretch>
-            <a:fillRect/>
-          </a:stretch>
-        </p:blipFill>
-        <p:spPr>
-          <a:xfrm>
-            <a:off x="2957209" y="2785175"/>
-            <a:ext cx="6188940" cy="1518036"/>
-          </a:xfrm>
-          <a:prstGeom prst="rect">
-            <a:avLst/>
-          </a:prstGeom>
-        </p:spPr>
-      </p:pic>
-    </p:spTree>
-    <p:extLst>
-      <p:ext uri="{BB962C8B-B14F-4D97-AF65-F5344CB8AC3E}">
-        <p14:creationId xmlns:p14="http://schemas.microsoft.com/office/powerpoint/2010/main" val="1317607076"/>
-      </p:ext>
-    </p:extLst>
-  </p:cSld>
-  <p:clrMapOvr>
-    <a:masterClrMapping/>
-  </p:clrMapOvr>
-</p:sld>
-</file>
-
-<file path=ppt/slides/slide7.xml><?xml version="1.0" encoding="utf-8"?>
-<p:sld xmlns:a="http://schemas.openxmlformats.org/drawingml/2006/main" xmlns:r="http://schemas.openxmlformats.org/officeDocument/2006/relationships" xmlns:p="http://schemas.openxmlformats.org/presentationml/2006/main">
-  <p:cSld>
-    <p:spTree>
-      <p:nvGrpSpPr>
-        <p:cNvPr id="1" name=""/>
-        <p:cNvGrpSpPr/>
-        <p:nvPr/>
-      </p:nvGrpSpPr>
-      <p:grpSpPr>
-        <a:xfrm>
-          <a:off x="0" y="0"/>
-          <a:ext cx="0" cy="0"/>
-          <a:chOff x="0" y="0"/>
-          <a:chExt cx="0" cy="0"/>
-        </a:xfrm>
-      </p:grpSpPr>
-      <p:sp>
-        <p:nvSpPr>
-          <p:cNvPr id="5" name="Rectangle 4">
-            <a:extLst>
-              <a:ext uri="{FF2B5EF4-FFF2-40B4-BE49-F238E27FC236}">
-                <a16:creationId xmlns:a16="http://schemas.microsoft.com/office/drawing/2014/main" id="{EDC80090-427D-472F-B159-13E453D077AD}"/>
-              </a:ext>
-            </a:extLst>
-          </p:cNvPr>
-          <p:cNvSpPr/>
-          <p:nvPr/>
-        </p:nvSpPr>
-        <p:spPr>
-          <a:xfrm>
-            <a:off x="2150150" y="-12680"/>
-            <a:ext cx="6858000" cy="6858000"/>
-          </a:xfrm>
-          <a:prstGeom prst="rect">
-            <a:avLst/>
-          </a:prstGeom>
-          <a:noFill/>
-          <a:ln>
-            <a:noFill/>
-          </a:ln>
-        </p:spPr>
-        <p:style>
-          <a:lnRef idx="2">
-            <a:schemeClr val="accent1">
-              <a:shade val="50000"/>
-            </a:schemeClr>
-          </a:lnRef>
-          <a:fillRef idx="1">
-            <a:schemeClr val="accent1"/>
-          </a:fillRef>
-          <a:effectRef idx="0">
-            <a:schemeClr val="accent1"/>
-          </a:effectRef>
-          <a:fontRef idx="minor">
-            <a:schemeClr val="lt1"/>
-          </a:fontRef>
-        </p:style>
-        <p:txBody>
-          <a:bodyPr rtlCol="0" anchor="ctr"/>
-          <a:lstStyle/>
-          <a:p>
-            <a:pPr algn="ctr"/>
-            <a:endParaRPr lang="en-PH"/>
-          </a:p>
-        </p:txBody>
-      </p:sp>
-      <p:sp>
-        <p:nvSpPr>
-          <p:cNvPr id="10" name="Parallelogram 9">
-            <a:extLst>
-              <a:ext uri="{FF2B5EF4-FFF2-40B4-BE49-F238E27FC236}">
-                <a16:creationId xmlns:a16="http://schemas.microsoft.com/office/drawing/2014/main" id="{A89FDD28-6649-491E-9EFF-F3AF1EFA9C14}"/>
-              </a:ext>
-            </a:extLst>
-          </p:cNvPr>
-          <p:cNvSpPr/>
-          <p:nvPr/>
-        </p:nvSpPr>
-        <p:spPr>
-          <a:xfrm>
-            <a:off x="3029562" y="3015121"/>
-            <a:ext cx="6132876" cy="783007"/>
-          </a:xfrm>
-          <a:prstGeom prst="parallelogram">
-            <a:avLst/>
-          </a:prstGeom>
-          <a:solidFill>
-            <a:srgbClr val="4BB7BB"/>
-          </a:solidFill>
-          <a:ln>
-            <a:noFill/>
-          </a:ln>
-        </p:spPr>
-        <p:style>
-          <a:lnRef idx="2">
-            <a:schemeClr val="accent1">
-              <a:shade val="50000"/>
-            </a:schemeClr>
-          </a:lnRef>
-          <a:fillRef idx="1">
-            <a:schemeClr val="accent1"/>
-          </a:fillRef>
-          <a:effectRef idx="0">
-            <a:schemeClr val="accent1"/>
-          </a:effectRef>
-          <a:fontRef idx="minor">
-            <a:schemeClr val="lt1"/>
-          </a:fontRef>
-        </p:style>
-        <p:txBody>
-          <a:bodyPr rtlCol="0" anchor="ctr"/>
-          <a:lstStyle/>
-          <a:p>
-            <a:pPr algn="ctr"/>
-            <a:endParaRPr lang="en-PH"/>
-          </a:p>
-        </p:txBody>
-      </p:sp>
-      <p:sp>
-        <p:nvSpPr>
-          <p:cNvPr id="6" name="Oval 5">
-            <a:extLst>
-              <a:ext uri="{FF2B5EF4-FFF2-40B4-BE49-F238E27FC236}">
-                <a16:creationId xmlns:a16="http://schemas.microsoft.com/office/drawing/2014/main" id="{B1AE4BB8-C265-4E9C-ABC7-44010C5E6FB2}"/>
-              </a:ext>
-            </a:extLst>
-          </p:cNvPr>
-          <p:cNvSpPr/>
-          <p:nvPr/>
-        </p:nvSpPr>
-        <p:spPr>
-          <a:xfrm>
-            <a:off x="4953000" y="429108"/>
-            <a:ext cx="2286000" cy="2286000"/>
-          </a:xfrm>
-          <a:prstGeom prst="ellipse">
-            <a:avLst/>
-          </a:prstGeom>
-          <a:solidFill>
-            <a:schemeClr val="bg1"/>
-          </a:solidFill>
-          <a:ln w="152400">
-            <a:solidFill>
-              <a:srgbClr val="4BB7BB"/>
-            </a:solidFill>
-          </a:ln>
-        </p:spPr>
-        <p:style>
-          <a:lnRef idx="2">
-            <a:schemeClr val="accent1">
-              <a:shade val="50000"/>
-            </a:schemeClr>
-          </a:lnRef>
-          <a:fillRef idx="1">
-            <a:schemeClr val="accent1"/>
-          </a:fillRef>
-          <a:effectRef idx="0">
-            <a:schemeClr val="accent1"/>
-          </a:effectRef>
-          <a:fontRef idx="minor">
-            <a:schemeClr val="lt1"/>
-          </a:fontRef>
-        </p:style>
-        <p:txBody>
-          <a:bodyPr rtlCol="0" anchor="ctr"/>
-          <a:lstStyle/>
-          <a:p>
-            <a:pPr algn="ctr"/>
-            <a:endParaRPr lang="en-PH"/>
-          </a:p>
-        </p:txBody>
-      </p:sp>
-      <p:grpSp>
-        <p:nvGrpSpPr>
-          <p:cNvPr id="7" name="Group 6">
-            <a:extLst>
-              <a:ext uri="{FF2B5EF4-FFF2-40B4-BE49-F238E27FC236}">
-                <a16:creationId xmlns:a16="http://schemas.microsoft.com/office/drawing/2014/main" id="{EBBFBED0-F70D-43F8-9B02-F58EC8FB9999}"/>
-              </a:ext>
-            </a:extLst>
-          </p:cNvPr>
-          <p:cNvGrpSpPr/>
-          <p:nvPr/>
-        </p:nvGrpSpPr>
-        <p:grpSpPr>
-          <a:xfrm>
-            <a:off x="5363542" y="832976"/>
-            <a:ext cx="1485602" cy="1439905"/>
-            <a:chOff x="8048963" y="1478696"/>
-            <a:chExt cx="1152425" cy="1115682"/>
-          </a:xfrm>
-        </p:grpSpPr>
-        <p:pic>
-          <p:nvPicPr>
-            <p:cNvPr id="17" name="Picture 16">
-              <a:extLst>
-                <a:ext uri="{FF2B5EF4-FFF2-40B4-BE49-F238E27FC236}">
-                  <a16:creationId xmlns:a16="http://schemas.microsoft.com/office/drawing/2014/main" id="{94004DCD-EBF8-49F9-A245-58E6F070D3CD}"/>
-                </a:ext>
-              </a:extLst>
-            </p:cNvPr>
-            <p:cNvPicPr>
-              <a:picLocks noChangeAspect="1"/>
-            </p:cNvPicPr>
-            <p:nvPr/>
-          </p:nvPicPr>
-          <p:blipFill rotWithShape="1">
-            <a:blip r:embed="rId2">
-              <a:clrChange>
-                <a:clrFrom>
-                  <a:srgbClr val="FFFFFF"/>
-                </a:clrFrom>
-                <a:clrTo>
-                  <a:srgbClr val="FFFFFF">
-                    <a:alpha val="0"/>
-                  </a:srgbClr>
-                </a:clrTo>
-              </a:clrChange>
-              <a:extLst>
-                <a:ext uri="{28A0092B-C50C-407E-A947-70E740481C1C}">
-                  <a14:useLocalDpi xmlns:a14="http://schemas.microsoft.com/office/drawing/2010/main" val="0"/>
-                </a:ext>
-              </a:extLst>
-            </a:blip>
-            <a:srcRect l="42680" t="18888" r="40516" b="64924"/>
-            <a:stretch/>
-          </p:blipFill>
-          <p:spPr>
-            <a:xfrm>
-              <a:off x="8048963" y="1478696"/>
-              <a:ext cx="1152425" cy="1110154"/>
-            </a:xfrm>
-            <a:prstGeom prst="rect">
-              <a:avLst/>
-            </a:prstGeom>
-          </p:spPr>
-        </p:pic>
-        <p:sp>
-          <p:nvSpPr>
-            <p:cNvPr id="4" name="Rectangle 3">
-              <a:extLst>
-                <a:ext uri="{FF2B5EF4-FFF2-40B4-BE49-F238E27FC236}">
-                  <a16:creationId xmlns:a16="http://schemas.microsoft.com/office/drawing/2014/main" id="{BBBE39C1-E084-4774-96F3-FB301A1F659B}"/>
-                </a:ext>
-              </a:extLst>
-            </p:cNvPr>
-            <p:cNvSpPr/>
-            <p:nvPr/>
-          </p:nvSpPr>
-          <p:spPr>
-            <a:xfrm>
-              <a:off x="9008150" y="2430274"/>
-              <a:ext cx="193238" cy="164104"/>
-            </a:xfrm>
-            <a:prstGeom prst="rect">
-              <a:avLst/>
-            </a:prstGeom>
-            <a:solidFill>
-              <a:schemeClr val="bg1"/>
-            </a:solidFill>
-            <a:ln>
-              <a:solidFill>
-                <a:schemeClr val="bg1"/>
-              </a:solidFill>
-            </a:ln>
-          </p:spPr>
-          <p:style>
-            <a:lnRef idx="2">
-              <a:schemeClr val="accent1">
-                <a:shade val="50000"/>
-              </a:schemeClr>
-            </a:lnRef>
-            <a:fillRef idx="1">
-              <a:schemeClr val="accent1"/>
-            </a:fillRef>
-            <a:effectRef idx="0">
-              <a:schemeClr val="accent1"/>
-            </a:effectRef>
-            <a:fontRef idx="minor">
-              <a:schemeClr val="lt1"/>
-            </a:fontRef>
-          </p:style>
-          <p:txBody>
-            <a:bodyPr rtlCol="0" anchor="ctr"/>
-            <a:lstStyle/>
-            <a:p>
-              <a:pPr algn="ctr"/>
-              <a:endParaRPr lang="en-PH"/>
-            </a:p>
-          </p:txBody>
-        </p:sp>
+              </a:ln>
+            </p:spPr>
+            <p:style>
+              <a:lnRef idx="2">
+                <a:schemeClr val="accent1">
+                  <a:shade val="50000"/>
+                </a:schemeClr>
+              </a:lnRef>
+              <a:fillRef idx="1">
+                <a:schemeClr val="accent1"/>
+              </a:fillRef>
+              <a:effectRef idx="0">
+                <a:schemeClr val="accent1"/>
+              </a:effectRef>
+              <a:fontRef idx="minor">
+                <a:schemeClr val="lt1"/>
+              </a:fontRef>
+            </p:style>
+            <p:txBody>
+              <a:bodyPr rtlCol="0" anchor="ctr"/>
+              <a:lstStyle/>
+              <a:p>
+                <a:pPr algn="ctr"/>
+                <a:endParaRPr lang="en-PH"/>
+              </a:p>
+            </p:txBody>
+          </p:sp>
+        </p:grpSp>
       </p:grpSp>
       <p:pic>
         <p:nvPicPr>
@@ -5357,7 +3789,7 @@
 </p:sld>
 </file>
 
-<file path=ppt/slides/slide8.xml><?xml version="1.0" encoding="utf-8"?>
+<file path=ppt/slides/slide11.xml><?xml version="1.0" encoding="utf-8"?>
 <p:sld xmlns:a="http://schemas.openxmlformats.org/drawingml/2006/main" xmlns:r="http://schemas.openxmlformats.org/officeDocument/2006/relationships" xmlns:p="http://schemas.openxmlformats.org/presentationml/2006/main">
   <p:cSld>
     <p:spTree>
@@ -5671,7 +4103,7 @@
 </p:sld>
 </file>
 
-<file path=ppt/slides/slide9.xml><?xml version="1.0" encoding="utf-8"?>
+<file path=ppt/slides/slide12.xml><?xml version="1.0" encoding="utf-8"?>
 <p:sld xmlns:a="http://schemas.openxmlformats.org/drawingml/2006/main" xmlns:r="http://schemas.openxmlformats.org/officeDocument/2006/relationships" xmlns:p="http://schemas.openxmlformats.org/presentationml/2006/main">
   <p:cSld>
     <p:spTree>
@@ -5934,7 +4366,7 @@
         </p:blipFill>
         <p:spPr>
           <a:xfrm>
-            <a:off x="3029562" y="2765135"/>
+            <a:off x="3909126" y="4098141"/>
             <a:ext cx="6132876" cy="1518036"/>
           </a:xfrm>
           <a:prstGeom prst="rect">
@@ -6003,6 +4435,2044 @@
     <p:extLst>
       <p:ext uri="{BB962C8B-B14F-4D97-AF65-F5344CB8AC3E}">
         <p14:creationId xmlns:p14="http://schemas.microsoft.com/office/powerpoint/2010/main" val="2497859870"/>
+      </p:ext>
+    </p:extLst>
+  </p:cSld>
+  <p:clrMapOvr>
+    <a:masterClrMapping/>
+  </p:clrMapOvr>
+</p:sld>
+</file>
+
+<file path=ppt/slides/slide2.xml><?xml version="1.0" encoding="utf-8"?>
+<p:sld xmlns:a="http://schemas.openxmlformats.org/drawingml/2006/main" xmlns:r="http://schemas.openxmlformats.org/officeDocument/2006/relationships" xmlns:p="http://schemas.openxmlformats.org/presentationml/2006/main">
+  <p:cSld>
+    <p:spTree>
+      <p:nvGrpSpPr>
+        <p:cNvPr id="1" name=""/>
+        <p:cNvGrpSpPr/>
+        <p:nvPr/>
+      </p:nvGrpSpPr>
+      <p:grpSpPr>
+        <a:xfrm>
+          <a:off x="0" y="0"/>
+          <a:ext cx="0" cy="0"/>
+          <a:chOff x="0" y="0"/>
+          <a:chExt cx="0" cy="0"/>
+        </a:xfrm>
+      </p:grpSpPr>
+      <p:pic>
+        <p:nvPicPr>
+          <p:cNvPr id="7" name="Picture 6">
+            <a:extLst>
+              <a:ext uri="{FF2B5EF4-FFF2-40B4-BE49-F238E27FC236}">
+                <a16:creationId xmlns:a16="http://schemas.microsoft.com/office/drawing/2014/main" id="{812D1A4C-FC40-41FE-B8DA-6082D7E8515D}"/>
+              </a:ext>
+            </a:extLst>
+          </p:cNvPr>
+          <p:cNvPicPr>
+            <a:picLocks noChangeAspect="1"/>
+          </p:cNvPicPr>
+          <p:nvPr/>
+        </p:nvPicPr>
+        <p:blipFill>
+          <a:blip r:embed="rId2">
+            <a:extLst>
+              <a:ext uri="{28A0092B-C50C-407E-A947-70E740481C1C}">
+                <a14:useLocalDpi xmlns:a14="http://schemas.microsoft.com/office/drawing/2010/main" val="0"/>
+              </a:ext>
+            </a:extLst>
+          </a:blip>
+          <a:stretch>
+            <a:fillRect/>
+          </a:stretch>
+        </p:blipFill>
+        <p:spPr>
+          <a:xfrm>
+            <a:off x="2338618" y="0"/>
+            <a:ext cx="7514764" cy="6858000"/>
+          </a:xfrm>
+          <a:prstGeom prst="rect">
+            <a:avLst/>
+          </a:prstGeom>
+        </p:spPr>
+      </p:pic>
+    </p:spTree>
+    <p:extLst>
+      <p:ext uri="{BB962C8B-B14F-4D97-AF65-F5344CB8AC3E}">
+        <p14:creationId xmlns:p14="http://schemas.microsoft.com/office/powerpoint/2010/main" val="2367114868"/>
+      </p:ext>
+    </p:extLst>
+  </p:cSld>
+  <p:clrMapOvr>
+    <a:masterClrMapping/>
+  </p:clrMapOvr>
+</p:sld>
+</file>
+
+<file path=ppt/slides/slide3.xml><?xml version="1.0" encoding="utf-8"?>
+<p:sld xmlns:a="http://schemas.openxmlformats.org/drawingml/2006/main" xmlns:r="http://schemas.openxmlformats.org/officeDocument/2006/relationships" xmlns:p="http://schemas.openxmlformats.org/presentationml/2006/main">
+  <p:cSld>
+    <p:spTree>
+      <p:nvGrpSpPr>
+        <p:cNvPr id="1" name=""/>
+        <p:cNvGrpSpPr/>
+        <p:nvPr/>
+      </p:nvGrpSpPr>
+      <p:grpSpPr>
+        <a:xfrm>
+          <a:off x="0" y="0"/>
+          <a:ext cx="0" cy="0"/>
+          <a:chOff x="0" y="0"/>
+          <a:chExt cx="0" cy="0"/>
+        </a:xfrm>
+      </p:grpSpPr>
+      <p:pic>
+        <p:nvPicPr>
+          <p:cNvPr id="7" name="Picture 6">
+            <a:extLst>
+              <a:ext uri="{FF2B5EF4-FFF2-40B4-BE49-F238E27FC236}">
+                <a16:creationId xmlns:a16="http://schemas.microsoft.com/office/drawing/2014/main" id="{812D1A4C-FC40-41FE-B8DA-6082D7E8515D}"/>
+              </a:ext>
+            </a:extLst>
+          </p:cNvPr>
+          <p:cNvPicPr>
+            <a:picLocks noChangeAspect="1"/>
+          </p:cNvPicPr>
+          <p:nvPr/>
+        </p:nvPicPr>
+        <p:blipFill>
+          <a:blip r:embed="rId2">
+            <a:extLst>
+              <a:ext uri="{28A0092B-C50C-407E-A947-70E740481C1C}">
+                <a14:useLocalDpi xmlns:a14="http://schemas.microsoft.com/office/drawing/2010/main" val="0"/>
+              </a:ext>
+            </a:extLst>
+          </a:blip>
+          <a:stretch>
+            <a:fillRect/>
+          </a:stretch>
+        </p:blipFill>
+        <p:spPr>
+          <a:xfrm>
+            <a:off x="2338618" y="0"/>
+            <a:ext cx="7514764" cy="6858000"/>
+          </a:xfrm>
+          <a:prstGeom prst="rect">
+            <a:avLst/>
+          </a:prstGeom>
+          <a:ln>
+            <a:solidFill>
+              <a:schemeClr val="tx1"/>
+            </a:solidFill>
+          </a:ln>
+        </p:spPr>
+      </p:pic>
+      <p:sp>
+        <p:nvSpPr>
+          <p:cNvPr id="2" name="Rectangle 1">
+            <a:extLst>
+              <a:ext uri="{FF2B5EF4-FFF2-40B4-BE49-F238E27FC236}">
+                <a16:creationId xmlns:a16="http://schemas.microsoft.com/office/drawing/2014/main" id="{9F139DFE-55A9-4197-B296-976A15326E1F}"/>
+              </a:ext>
+            </a:extLst>
+          </p:cNvPr>
+          <p:cNvSpPr/>
+          <p:nvPr/>
+        </p:nvSpPr>
+        <p:spPr>
+          <a:xfrm>
+            <a:off x="2324100" y="0"/>
+            <a:ext cx="7543800" cy="6858000"/>
+          </a:xfrm>
+          <a:prstGeom prst="rect">
+            <a:avLst/>
+          </a:prstGeom>
+          <a:noFill/>
+          <a:ln>
+            <a:noFill/>
+          </a:ln>
+        </p:spPr>
+        <p:style>
+          <a:lnRef idx="2">
+            <a:schemeClr val="accent1">
+              <a:shade val="50000"/>
+            </a:schemeClr>
+          </a:lnRef>
+          <a:fillRef idx="1">
+            <a:schemeClr val="accent1"/>
+          </a:fillRef>
+          <a:effectRef idx="0">
+            <a:schemeClr val="accent1"/>
+          </a:effectRef>
+          <a:fontRef idx="minor">
+            <a:schemeClr val="lt1"/>
+          </a:fontRef>
+        </p:style>
+        <p:txBody>
+          <a:bodyPr rtlCol="0" anchor="ctr"/>
+          <a:lstStyle/>
+          <a:p>
+            <a:pPr algn="ctr"/>
+            <a:endParaRPr lang="en-PH"/>
+          </a:p>
+        </p:txBody>
+      </p:sp>
+    </p:spTree>
+    <p:extLst>
+      <p:ext uri="{BB962C8B-B14F-4D97-AF65-F5344CB8AC3E}">
+        <p14:creationId xmlns:p14="http://schemas.microsoft.com/office/powerpoint/2010/main" val="3557014814"/>
+      </p:ext>
+    </p:extLst>
+  </p:cSld>
+  <p:clrMapOvr>
+    <a:masterClrMapping/>
+  </p:clrMapOvr>
+</p:sld>
+</file>
+
+<file path=ppt/slides/slide4.xml><?xml version="1.0" encoding="utf-8"?>
+<p:sld xmlns:a="http://schemas.openxmlformats.org/drawingml/2006/main" xmlns:r="http://schemas.openxmlformats.org/officeDocument/2006/relationships" xmlns:p="http://schemas.openxmlformats.org/presentationml/2006/main">
+  <p:cSld>
+    <p:spTree>
+      <p:nvGrpSpPr>
+        <p:cNvPr id="1" name=""/>
+        <p:cNvGrpSpPr/>
+        <p:nvPr/>
+      </p:nvGrpSpPr>
+      <p:grpSpPr>
+        <a:xfrm>
+          <a:off x="0" y="0"/>
+          <a:ext cx="0" cy="0"/>
+          <a:chOff x="0" y="0"/>
+          <a:chExt cx="0" cy="0"/>
+        </a:xfrm>
+      </p:grpSpPr>
+      <p:grpSp>
+        <p:nvGrpSpPr>
+          <p:cNvPr id="7" name="Group 6">
+            <a:extLst>
+              <a:ext uri="{FF2B5EF4-FFF2-40B4-BE49-F238E27FC236}">
+                <a16:creationId xmlns:a16="http://schemas.microsoft.com/office/drawing/2014/main" id="{A9440E63-8009-4096-896E-E6340334636B}"/>
+              </a:ext>
+            </a:extLst>
+          </p:cNvPr>
+          <p:cNvGrpSpPr/>
+          <p:nvPr/>
+        </p:nvGrpSpPr>
+        <p:grpSpPr>
+          <a:xfrm>
+            <a:off x="2324100" y="0"/>
+            <a:ext cx="7543800" cy="6858000"/>
+            <a:chOff x="2324100" y="0"/>
+            <a:chExt cx="7543800" cy="6858000"/>
+          </a:xfrm>
+        </p:grpSpPr>
+        <p:sp>
+          <p:nvSpPr>
+            <p:cNvPr id="4" name="Rectangle 3">
+              <a:extLst>
+                <a:ext uri="{FF2B5EF4-FFF2-40B4-BE49-F238E27FC236}">
+                  <a16:creationId xmlns:a16="http://schemas.microsoft.com/office/drawing/2014/main" id="{BB6F7C97-5C16-484E-83B6-A459EDC9FFE6}"/>
+                </a:ext>
+              </a:extLst>
+            </p:cNvPr>
+            <p:cNvSpPr/>
+            <p:nvPr/>
+          </p:nvSpPr>
+          <p:spPr>
+            <a:xfrm>
+              <a:off x="2324100" y="0"/>
+              <a:ext cx="7543800" cy="6858000"/>
+            </a:xfrm>
+            <a:prstGeom prst="rect">
+              <a:avLst/>
+            </a:prstGeom>
+            <a:noFill/>
+            <a:ln>
+              <a:noFill/>
+            </a:ln>
+          </p:spPr>
+          <p:style>
+            <a:lnRef idx="2">
+              <a:schemeClr val="accent1">
+                <a:shade val="50000"/>
+              </a:schemeClr>
+            </a:lnRef>
+            <a:fillRef idx="1">
+              <a:schemeClr val="accent1"/>
+            </a:fillRef>
+            <a:effectRef idx="0">
+              <a:schemeClr val="accent1"/>
+            </a:effectRef>
+            <a:fontRef idx="minor">
+              <a:schemeClr val="lt1"/>
+            </a:fontRef>
+          </p:style>
+          <p:txBody>
+            <a:bodyPr rtlCol="0" anchor="ctr"/>
+            <a:lstStyle/>
+            <a:p>
+              <a:pPr algn="ctr"/>
+              <a:endParaRPr lang="en-PH"/>
+            </a:p>
+          </p:txBody>
+        </p:sp>
+        <p:sp>
+          <p:nvSpPr>
+            <p:cNvPr id="5" name="Rectangle 4">
+              <a:extLst>
+                <a:ext uri="{FF2B5EF4-FFF2-40B4-BE49-F238E27FC236}">
+                  <a16:creationId xmlns:a16="http://schemas.microsoft.com/office/drawing/2014/main" id="{1674DE02-61BF-4DA5-91F6-EE8FF8939612}"/>
+                </a:ext>
+              </a:extLst>
+            </p:cNvPr>
+            <p:cNvSpPr/>
+            <p:nvPr/>
+          </p:nvSpPr>
+          <p:spPr>
+            <a:xfrm>
+              <a:off x="2324100" y="0"/>
+              <a:ext cx="7543800" cy="6858000"/>
+            </a:xfrm>
+            <a:prstGeom prst="rect">
+              <a:avLst/>
+            </a:prstGeom>
+            <a:noFill/>
+            <a:ln>
+              <a:noFill/>
+            </a:ln>
+          </p:spPr>
+          <p:style>
+            <a:lnRef idx="2">
+              <a:schemeClr val="accent1">
+                <a:shade val="50000"/>
+              </a:schemeClr>
+            </a:lnRef>
+            <a:fillRef idx="1">
+              <a:schemeClr val="accent1"/>
+            </a:fillRef>
+            <a:effectRef idx="0">
+              <a:schemeClr val="accent1"/>
+            </a:effectRef>
+            <a:fontRef idx="minor">
+              <a:schemeClr val="lt1"/>
+            </a:fontRef>
+          </p:style>
+          <p:txBody>
+            <a:bodyPr rtlCol="0" anchor="ctr"/>
+            <a:lstStyle/>
+            <a:p>
+              <a:pPr algn="ctr"/>
+              <a:endParaRPr lang="en-PH"/>
+            </a:p>
+          </p:txBody>
+        </p:sp>
+        <p:pic>
+          <p:nvPicPr>
+            <p:cNvPr id="6" name="Picture 5">
+              <a:extLst>
+                <a:ext uri="{FF2B5EF4-FFF2-40B4-BE49-F238E27FC236}">
+                  <a16:creationId xmlns:a16="http://schemas.microsoft.com/office/drawing/2014/main" id="{7C57E6E6-15D5-4568-A0E3-B904DBEAFFA3}"/>
+                </a:ext>
+              </a:extLst>
+            </p:cNvPr>
+            <p:cNvPicPr>
+              <a:picLocks noChangeAspect="1"/>
+            </p:cNvPicPr>
+            <p:nvPr/>
+          </p:nvPicPr>
+          <p:blipFill rotWithShape="1">
+            <a:blip r:embed="rId2">
+              <a:clrChange>
+                <a:clrFrom>
+                  <a:srgbClr val="FFFFFF"/>
+                </a:clrFrom>
+                <a:clrTo>
+                  <a:srgbClr val="FFFFFF">
+                    <a:alpha val="0"/>
+                  </a:srgbClr>
+                </a:clrTo>
+              </a:clrChange>
+              <a:extLst>
+                <a:ext uri="{28A0092B-C50C-407E-A947-70E740481C1C}">
+                  <a14:useLocalDpi xmlns:a14="http://schemas.microsoft.com/office/drawing/2010/main" val="0"/>
+                </a:ext>
+              </a:extLst>
+            </a:blip>
+            <a:srcRect l="17552" r="29889"/>
+            <a:stretch/>
+          </p:blipFill>
+          <p:spPr>
+            <a:xfrm>
+              <a:off x="4121150" y="0"/>
+              <a:ext cx="3949700" cy="6858000"/>
+            </a:xfrm>
+            <a:prstGeom prst="rect">
+              <a:avLst/>
+            </a:prstGeom>
+          </p:spPr>
+        </p:pic>
+      </p:grpSp>
+    </p:spTree>
+    <p:extLst>
+      <p:ext uri="{BB962C8B-B14F-4D97-AF65-F5344CB8AC3E}">
+        <p14:creationId xmlns:p14="http://schemas.microsoft.com/office/powerpoint/2010/main" val="2821874055"/>
+      </p:ext>
+    </p:extLst>
+  </p:cSld>
+  <p:clrMapOvr>
+    <a:masterClrMapping/>
+  </p:clrMapOvr>
+</p:sld>
+</file>
+
+<file path=ppt/slides/slide5.xml><?xml version="1.0" encoding="utf-8"?>
+<p:sld xmlns:a="http://schemas.openxmlformats.org/drawingml/2006/main" xmlns:r="http://schemas.openxmlformats.org/officeDocument/2006/relationships" xmlns:p="http://schemas.openxmlformats.org/presentationml/2006/main">
+  <p:cSld>
+    <p:spTree>
+      <p:nvGrpSpPr>
+        <p:cNvPr id="1" name=""/>
+        <p:cNvGrpSpPr/>
+        <p:nvPr/>
+      </p:nvGrpSpPr>
+      <p:grpSpPr>
+        <a:xfrm>
+          <a:off x="0" y="0"/>
+          <a:ext cx="0" cy="0"/>
+          <a:chOff x="0" y="0"/>
+          <a:chExt cx="0" cy="0"/>
+        </a:xfrm>
+      </p:grpSpPr>
+      <p:pic>
+        <p:nvPicPr>
+          <p:cNvPr id="12" name="Picture 11">
+            <a:extLst>
+              <a:ext uri="{FF2B5EF4-FFF2-40B4-BE49-F238E27FC236}">
+                <a16:creationId xmlns:a16="http://schemas.microsoft.com/office/drawing/2014/main" id="{7C8E294F-A4E0-4FAE-AAED-4A763C3974B5}"/>
+              </a:ext>
+            </a:extLst>
+          </p:cNvPr>
+          <p:cNvPicPr>
+            <a:picLocks noChangeAspect="1"/>
+          </p:cNvPicPr>
+          <p:nvPr/>
+        </p:nvPicPr>
+        <p:blipFill>
+          <a:blip r:embed="rId2">
+            <a:extLst>
+              <a:ext uri="{28A0092B-C50C-407E-A947-70E740481C1C}">
+                <a14:useLocalDpi xmlns:a14="http://schemas.microsoft.com/office/drawing/2010/main" val="0"/>
+              </a:ext>
+            </a:extLst>
+          </a:blip>
+          <a:stretch>
+            <a:fillRect/>
+          </a:stretch>
+        </p:blipFill>
+        <p:spPr>
+          <a:xfrm>
+            <a:off x="2573517" y="625138"/>
+            <a:ext cx="3479610" cy="3447241"/>
+          </a:xfrm>
+          <a:prstGeom prst="rect">
+            <a:avLst/>
+          </a:prstGeom>
+        </p:spPr>
+      </p:pic>
+      <p:pic>
+        <p:nvPicPr>
+          <p:cNvPr id="13" name="Picture 12">
+            <a:extLst>
+              <a:ext uri="{FF2B5EF4-FFF2-40B4-BE49-F238E27FC236}">
+                <a16:creationId xmlns:a16="http://schemas.microsoft.com/office/drawing/2014/main" id="{6B54C6BA-6461-4495-8386-B67B9C6B90AB}"/>
+              </a:ext>
+            </a:extLst>
+          </p:cNvPr>
+          <p:cNvPicPr>
+            <a:picLocks noChangeAspect="1"/>
+          </p:cNvPicPr>
+          <p:nvPr/>
+        </p:nvPicPr>
+        <p:blipFill rotWithShape="1">
+          <a:blip r:embed="rId2">
+            <a:extLst>
+              <a:ext uri="{28A0092B-C50C-407E-A947-70E740481C1C}">
+                <a14:useLocalDpi xmlns:a14="http://schemas.microsoft.com/office/drawing/2010/main" val="0"/>
+              </a:ext>
+            </a:extLst>
+          </a:blip>
+          <a:srcRect l="18906" t="23159" r="14178" b="29806"/>
+          <a:stretch/>
+        </p:blipFill>
+        <p:spPr>
+          <a:xfrm>
+            <a:off x="6796726" y="1423447"/>
+            <a:ext cx="2328420" cy="1621411"/>
+          </a:xfrm>
+          <a:prstGeom prst="rect">
+            <a:avLst/>
+          </a:prstGeom>
+        </p:spPr>
+      </p:pic>
+      <p:sp>
+        <p:nvSpPr>
+          <p:cNvPr id="15" name="Oval 14">
+            <a:extLst>
+              <a:ext uri="{FF2B5EF4-FFF2-40B4-BE49-F238E27FC236}">
+                <a16:creationId xmlns:a16="http://schemas.microsoft.com/office/drawing/2014/main" id="{3E649217-3F20-4F9D-BB8F-D765B387CE16}"/>
+              </a:ext>
+            </a:extLst>
+          </p:cNvPr>
+          <p:cNvSpPr/>
+          <p:nvPr/>
+        </p:nvSpPr>
+        <p:spPr>
+          <a:xfrm>
+            <a:off x="7560196" y="1423447"/>
+            <a:ext cx="3291073" cy="3291073"/>
+          </a:xfrm>
+          <a:prstGeom prst="ellipse">
+            <a:avLst/>
+          </a:prstGeom>
+        </p:spPr>
+        <p:style>
+          <a:lnRef idx="2">
+            <a:schemeClr val="accent1">
+              <a:shade val="50000"/>
+            </a:schemeClr>
+          </a:lnRef>
+          <a:fillRef idx="1">
+            <a:schemeClr val="accent1"/>
+          </a:fillRef>
+          <a:effectRef idx="0">
+            <a:schemeClr val="accent1"/>
+          </a:effectRef>
+          <a:fontRef idx="minor">
+            <a:schemeClr val="lt1"/>
+          </a:fontRef>
+        </p:style>
+        <p:txBody>
+          <a:bodyPr rtlCol="0" anchor="ctr"/>
+          <a:lstStyle/>
+          <a:p>
+            <a:pPr algn="ctr"/>
+            <a:endParaRPr lang="en-PH"/>
+          </a:p>
+        </p:txBody>
+      </p:sp>
+      <p:pic>
+        <p:nvPicPr>
+          <p:cNvPr id="16" name="Picture 15">
+            <a:extLst>
+              <a:ext uri="{FF2B5EF4-FFF2-40B4-BE49-F238E27FC236}">
+                <a16:creationId xmlns:a16="http://schemas.microsoft.com/office/drawing/2014/main" id="{E25E62B5-A0BC-4B44-BD48-B053472E5AF6}"/>
+              </a:ext>
+            </a:extLst>
+          </p:cNvPr>
+          <p:cNvPicPr>
+            <a:picLocks noChangeAspect="1"/>
+          </p:cNvPicPr>
+          <p:nvPr/>
+        </p:nvPicPr>
+        <p:blipFill>
+          <a:blip r:embed="rId2">
+            <a:extLst>
+              <a:ext uri="{28A0092B-C50C-407E-A947-70E740481C1C}">
+                <a14:useLocalDpi xmlns:a14="http://schemas.microsoft.com/office/drawing/2010/main" val="0"/>
+              </a:ext>
+            </a:extLst>
+          </a:blip>
+          <a:stretch>
+            <a:fillRect/>
+          </a:stretch>
+        </p:blipFill>
+        <p:spPr>
+          <a:xfrm>
+            <a:off x="2725917" y="777538"/>
+            <a:ext cx="3479610" cy="3447241"/>
+          </a:xfrm>
+          <a:prstGeom prst="rect">
+            <a:avLst/>
+          </a:prstGeom>
+        </p:spPr>
+      </p:pic>
+      <p:pic>
+        <p:nvPicPr>
+          <p:cNvPr id="18" name="Picture 17">
+            <a:extLst>
+              <a:ext uri="{FF2B5EF4-FFF2-40B4-BE49-F238E27FC236}">
+                <a16:creationId xmlns:a16="http://schemas.microsoft.com/office/drawing/2014/main" id="{855AAF4D-D3CA-4F00-9E47-F358B4B19207}"/>
+              </a:ext>
+            </a:extLst>
+          </p:cNvPr>
+          <p:cNvPicPr>
+            <a:picLocks noChangeAspect="1"/>
+          </p:cNvPicPr>
+          <p:nvPr/>
+        </p:nvPicPr>
+        <p:blipFill>
+          <a:blip r:embed="rId3">
+            <a:extLst>
+              <a:ext uri="{28A0092B-C50C-407E-A947-70E740481C1C}">
+                <a14:useLocalDpi xmlns:a14="http://schemas.microsoft.com/office/drawing/2010/main" val="0"/>
+              </a:ext>
+            </a:extLst>
+          </a:blip>
+          <a:stretch>
+            <a:fillRect/>
+          </a:stretch>
+        </p:blipFill>
+        <p:spPr>
+          <a:xfrm>
+            <a:off x="480668" y="1147082"/>
+            <a:ext cx="6389370" cy="4563836"/>
+          </a:xfrm>
+          <a:prstGeom prst="rect">
+            <a:avLst/>
+          </a:prstGeom>
+        </p:spPr>
+      </p:pic>
+    </p:spTree>
+    <p:extLst>
+      <p:ext uri="{BB962C8B-B14F-4D97-AF65-F5344CB8AC3E}">
+        <p14:creationId xmlns:p14="http://schemas.microsoft.com/office/powerpoint/2010/main" val="2106479747"/>
+      </p:ext>
+    </p:extLst>
+  </p:cSld>
+  <p:clrMapOvr>
+    <a:masterClrMapping/>
+  </p:clrMapOvr>
+</p:sld>
+</file>
+
+<file path=ppt/slides/slide6.xml><?xml version="1.0" encoding="utf-8"?>
+<p:sld xmlns:a="http://schemas.openxmlformats.org/drawingml/2006/main" xmlns:r="http://schemas.openxmlformats.org/officeDocument/2006/relationships" xmlns:p="http://schemas.openxmlformats.org/presentationml/2006/main">
+  <p:cSld>
+    <p:spTree>
+      <p:nvGrpSpPr>
+        <p:cNvPr id="1" name=""/>
+        <p:cNvGrpSpPr/>
+        <p:nvPr/>
+      </p:nvGrpSpPr>
+      <p:grpSpPr>
+        <a:xfrm>
+          <a:off x="0" y="0"/>
+          <a:ext cx="0" cy="0"/>
+          <a:chOff x="0" y="0"/>
+          <a:chExt cx="0" cy="0"/>
+        </a:xfrm>
+      </p:grpSpPr>
+      <p:sp>
+        <p:nvSpPr>
+          <p:cNvPr id="5" name="Rectangle 4">
+            <a:extLst>
+              <a:ext uri="{FF2B5EF4-FFF2-40B4-BE49-F238E27FC236}">
+                <a16:creationId xmlns:a16="http://schemas.microsoft.com/office/drawing/2014/main" id="{EDC80090-427D-472F-B159-13E453D077AD}"/>
+              </a:ext>
+            </a:extLst>
+          </p:cNvPr>
+          <p:cNvSpPr/>
+          <p:nvPr/>
+        </p:nvSpPr>
+        <p:spPr>
+          <a:xfrm>
+            <a:off x="2667000" y="0"/>
+            <a:ext cx="6858000" cy="6858000"/>
+          </a:xfrm>
+          <a:prstGeom prst="rect">
+            <a:avLst/>
+          </a:prstGeom>
+          <a:solidFill>
+            <a:schemeClr val="bg1"/>
+          </a:solidFill>
+          <a:ln>
+            <a:noFill/>
+          </a:ln>
+        </p:spPr>
+        <p:style>
+          <a:lnRef idx="2">
+            <a:schemeClr val="accent1">
+              <a:shade val="50000"/>
+            </a:schemeClr>
+          </a:lnRef>
+          <a:fillRef idx="1">
+            <a:schemeClr val="accent1"/>
+          </a:fillRef>
+          <a:effectRef idx="0">
+            <a:schemeClr val="accent1"/>
+          </a:effectRef>
+          <a:fontRef idx="minor">
+            <a:schemeClr val="lt1"/>
+          </a:fontRef>
+        </p:style>
+        <p:txBody>
+          <a:bodyPr rtlCol="0" anchor="ctr"/>
+          <a:lstStyle/>
+          <a:p>
+            <a:pPr algn="ctr"/>
+            <a:endParaRPr lang="en-PH"/>
+          </a:p>
+        </p:txBody>
+      </p:sp>
+      <p:grpSp>
+        <p:nvGrpSpPr>
+          <p:cNvPr id="9" name="Group 8">
+            <a:extLst>
+              <a:ext uri="{FF2B5EF4-FFF2-40B4-BE49-F238E27FC236}">
+                <a16:creationId xmlns:a16="http://schemas.microsoft.com/office/drawing/2014/main" id="{6BB7E984-7DE1-47C1-B427-1B4E961CB720}"/>
+              </a:ext>
+            </a:extLst>
+          </p:cNvPr>
+          <p:cNvGrpSpPr/>
+          <p:nvPr/>
+        </p:nvGrpSpPr>
+        <p:grpSpPr>
+          <a:xfrm>
+            <a:off x="4953000" y="429108"/>
+            <a:ext cx="2286000" cy="2286000"/>
+            <a:chOff x="1133325" y="720723"/>
+            <a:chExt cx="2286000" cy="2286000"/>
+          </a:xfrm>
+        </p:grpSpPr>
+        <p:sp>
+          <p:nvSpPr>
+            <p:cNvPr id="6" name="Oval 5">
+              <a:extLst>
+                <a:ext uri="{FF2B5EF4-FFF2-40B4-BE49-F238E27FC236}">
+                  <a16:creationId xmlns:a16="http://schemas.microsoft.com/office/drawing/2014/main" id="{B1AE4BB8-C265-4E9C-ABC7-44010C5E6FB2}"/>
+                </a:ext>
+              </a:extLst>
+            </p:cNvPr>
+            <p:cNvSpPr/>
+            <p:nvPr/>
+          </p:nvSpPr>
+          <p:spPr>
+            <a:xfrm>
+              <a:off x="1133325" y="720723"/>
+              <a:ext cx="2286000" cy="2286000"/>
+            </a:xfrm>
+            <a:prstGeom prst="ellipse">
+              <a:avLst/>
+            </a:prstGeom>
+            <a:solidFill>
+              <a:schemeClr val="bg1">
+                <a:lumMod val="95000"/>
+              </a:schemeClr>
+            </a:solidFill>
+            <a:ln w="152400">
+              <a:solidFill>
+                <a:srgbClr val="9EC840"/>
+              </a:solidFill>
+            </a:ln>
+          </p:spPr>
+          <p:style>
+            <a:lnRef idx="2">
+              <a:schemeClr val="accent1">
+                <a:shade val="50000"/>
+              </a:schemeClr>
+            </a:lnRef>
+            <a:fillRef idx="1">
+              <a:schemeClr val="accent1"/>
+            </a:fillRef>
+            <a:effectRef idx="0">
+              <a:schemeClr val="accent1"/>
+            </a:effectRef>
+            <a:fontRef idx="minor">
+              <a:schemeClr val="lt1"/>
+            </a:fontRef>
+          </p:style>
+          <p:txBody>
+            <a:bodyPr rtlCol="0" anchor="ctr"/>
+            <a:lstStyle/>
+            <a:p>
+              <a:pPr algn="ctr"/>
+              <a:endParaRPr lang="en-PH"/>
+            </a:p>
+          </p:txBody>
+        </p:sp>
+        <p:pic>
+          <p:nvPicPr>
+            <p:cNvPr id="8" name="Picture 7">
+              <a:extLst>
+                <a:ext uri="{FF2B5EF4-FFF2-40B4-BE49-F238E27FC236}">
+                  <a16:creationId xmlns:a16="http://schemas.microsoft.com/office/drawing/2014/main" id="{AC0C1D45-2478-4AA0-A075-49FB3030CC97}"/>
+                </a:ext>
+              </a:extLst>
+            </p:cNvPr>
+            <p:cNvPicPr>
+              <a:picLocks noChangeAspect="1"/>
+            </p:cNvPicPr>
+            <p:nvPr/>
+          </p:nvPicPr>
+          <p:blipFill rotWithShape="1">
+            <a:blip r:embed="rId2">
+              <a:clrChange>
+                <a:clrFrom>
+                  <a:srgbClr val="FFFFFF"/>
+                </a:clrFrom>
+                <a:clrTo>
+                  <a:srgbClr val="FFFFFF">
+                    <a:alpha val="0"/>
+                  </a:srgbClr>
+                </a:clrTo>
+              </a:clrChange>
+              <a:extLst>
+                <a:ext uri="{28A0092B-C50C-407E-A947-70E740481C1C}">
+                  <a14:useLocalDpi xmlns:a14="http://schemas.microsoft.com/office/drawing/2010/main" val="0"/>
+                </a:ext>
+              </a:extLst>
+            </a:blip>
+            <a:srcRect l="18906" t="23159" r="14178" b="29806"/>
+            <a:stretch/>
+          </p:blipFill>
+          <p:spPr>
+            <a:xfrm>
+              <a:off x="1307533" y="1189098"/>
+              <a:ext cx="1937584" cy="1349250"/>
+            </a:xfrm>
+            <a:prstGeom prst="rect">
+              <a:avLst/>
+            </a:prstGeom>
+          </p:spPr>
+        </p:pic>
+      </p:grpSp>
+      <p:sp>
+        <p:nvSpPr>
+          <p:cNvPr id="10" name="Parallelogram 9">
+            <a:extLst>
+              <a:ext uri="{FF2B5EF4-FFF2-40B4-BE49-F238E27FC236}">
+                <a16:creationId xmlns:a16="http://schemas.microsoft.com/office/drawing/2014/main" id="{A89FDD28-6649-491E-9EFF-F3AF1EFA9C14}"/>
+              </a:ext>
+            </a:extLst>
+          </p:cNvPr>
+          <p:cNvSpPr/>
+          <p:nvPr/>
+        </p:nvSpPr>
+        <p:spPr>
+          <a:xfrm>
+            <a:off x="3029562" y="3015121"/>
+            <a:ext cx="6132876" cy="783007"/>
+          </a:xfrm>
+          <a:prstGeom prst="parallelogram">
+            <a:avLst/>
+          </a:prstGeom>
+          <a:solidFill>
+            <a:srgbClr val="9EC840"/>
+          </a:solidFill>
+          <a:ln>
+            <a:noFill/>
+          </a:ln>
+        </p:spPr>
+        <p:style>
+          <a:lnRef idx="2">
+            <a:schemeClr val="accent1">
+              <a:shade val="50000"/>
+            </a:schemeClr>
+          </a:lnRef>
+          <a:fillRef idx="1">
+            <a:schemeClr val="accent1"/>
+          </a:fillRef>
+          <a:effectRef idx="0">
+            <a:schemeClr val="accent1"/>
+          </a:effectRef>
+          <a:fontRef idx="minor">
+            <a:schemeClr val="lt1"/>
+          </a:fontRef>
+        </p:style>
+        <p:txBody>
+          <a:bodyPr rtlCol="0" anchor="ctr"/>
+          <a:lstStyle/>
+          <a:p>
+            <a:pPr algn="ctr"/>
+            <a:endParaRPr lang="en-PH"/>
+          </a:p>
+        </p:txBody>
+      </p:sp>
+      <p:sp>
+        <p:nvSpPr>
+          <p:cNvPr id="11" name="Rectangle 10">
+            <a:extLst>
+              <a:ext uri="{FF2B5EF4-FFF2-40B4-BE49-F238E27FC236}">
+                <a16:creationId xmlns:a16="http://schemas.microsoft.com/office/drawing/2014/main" id="{7FC8E1EB-68A2-4CCA-867F-DE4DA42667FA}"/>
+              </a:ext>
+            </a:extLst>
+          </p:cNvPr>
+          <p:cNvSpPr/>
+          <p:nvPr/>
+        </p:nvSpPr>
+        <p:spPr>
+          <a:xfrm>
+            <a:off x="1023174" y="429108"/>
+            <a:ext cx="10755252" cy="923330"/>
+          </a:xfrm>
+          <a:prstGeom prst="rect">
+            <a:avLst/>
+          </a:prstGeom>
+          <a:noFill/>
+        </p:spPr>
+        <p:txBody>
+          <a:bodyPr wrap="none" lIns="91440" tIns="45720" rIns="91440" bIns="45720">
+            <a:spAutoFit/>
+          </a:bodyPr>
+          <a:lstStyle/>
+          <a:p>
+            <a:pPr algn="ctr"/>
+            <a:r>
+              <a:rPr lang="en-US" sz="5400" b="0" cap="none" spc="0" dirty="0">
+                <a:ln w="0"/>
+                <a:solidFill>
+                  <a:schemeClr val="bg1"/>
+                </a:solidFill>
+                <a:effectLst>
+                  <a:outerShdw blurRad="38100" dist="19050" dir="2700000" algn="tl" rotWithShape="0">
+                    <a:schemeClr val="dk1">
+                      <a:alpha val="40000"/>
+                    </a:schemeClr>
+                  </a:outerShdw>
+                </a:effectLst>
+                <a:latin typeface="Arial Black" panose="020B0A04020102020204" pitchFamily="34" charset="0"/>
+              </a:rPr>
+              <a:t>AS AN EDUCATION CENTER</a:t>
+            </a:r>
+          </a:p>
+        </p:txBody>
+      </p:sp>
+      <p:pic>
+        <p:nvPicPr>
+          <p:cNvPr id="12" name="Picture 11">
+            <a:extLst>
+              <a:ext uri="{FF2B5EF4-FFF2-40B4-BE49-F238E27FC236}">
+                <a16:creationId xmlns:a16="http://schemas.microsoft.com/office/drawing/2014/main" id="{2648AF8D-8F88-46F8-8D24-4509E047F504}"/>
+              </a:ext>
+            </a:extLst>
+          </p:cNvPr>
+          <p:cNvPicPr>
+            <a:picLocks noChangeAspect="1"/>
+          </p:cNvPicPr>
+          <p:nvPr/>
+        </p:nvPicPr>
+        <p:blipFill>
+          <a:blip r:embed="rId3"/>
+          <a:stretch>
+            <a:fillRect/>
+          </a:stretch>
+        </p:blipFill>
+        <p:spPr>
+          <a:xfrm>
+            <a:off x="3029562" y="2765135"/>
+            <a:ext cx="6132876" cy="1518036"/>
+          </a:xfrm>
+          <a:prstGeom prst="rect">
+            <a:avLst/>
+          </a:prstGeom>
+        </p:spPr>
+      </p:pic>
+      <p:sp>
+        <p:nvSpPr>
+          <p:cNvPr id="13" name="TextBox 12">
+            <a:extLst>
+              <a:ext uri="{FF2B5EF4-FFF2-40B4-BE49-F238E27FC236}">
+                <a16:creationId xmlns:a16="http://schemas.microsoft.com/office/drawing/2014/main" id="{066EC97D-4911-4D7C-B645-80A61F380F2A}"/>
+              </a:ext>
+            </a:extLst>
+          </p:cNvPr>
+          <p:cNvSpPr txBox="1"/>
+          <p:nvPr/>
+        </p:nvSpPr>
+        <p:spPr>
+          <a:xfrm>
+            <a:off x="3184002" y="3857668"/>
+            <a:ext cx="5823996" cy="2308324"/>
+          </a:xfrm>
+          <a:prstGeom prst="rect">
+            <a:avLst/>
+          </a:prstGeom>
+          <a:noFill/>
+        </p:spPr>
+        <p:txBody>
+          <a:bodyPr wrap="square" rtlCol="0">
+            <a:spAutoFit/>
+          </a:bodyPr>
+          <a:lstStyle/>
+          <a:p>
+            <a:pPr algn="ctr"/>
+            <a:r>
+              <a:rPr lang="en-PH" sz="3600" dirty="0"/>
+              <a:t>To inspire and empower every</a:t>
+            </a:r>
+          </a:p>
+          <a:p>
+            <a:pPr algn="ctr"/>
+            <a:r>
+              <a:rPr lang="en-PH" sz="3600" dirty="0"/>
+              <a:t>Filipino with the knowledge of</a:t>
+            </a:r>
+          </a:p>
+          <a:p>
+            <a:pPr algn="ctr"/>
+            <a:r>
+              <a:rPr lang="en-PH" sz="3600" dirty="0"/>
+              <a:t>the national budget through</a:t>
+            </a:r>
+          </a:p>
+          <a:p>
+            <a:pPr algn="ctr"/>
+            <a:r>
+              <a:rPr lang="en-PH" sz="3600" dirty="0"/>
+              <a:t>education.</a:t>
+            </a:r>
+          </a:p>
+        </p:txBody>
+      </p:sp>
+    </p:spTree>
+    <p:extLst>
+      <p:ext uri="{BB962C8B-B14F-4D97-AF65-F5344CB8AC3E}">
+        <p14:creationId xmlns:p14="http://schemas.microsoft.com/office/powerpoint/2010/main" val="1703452172"/>
+      </p:ext>
+    </p:extLst>
+  </p:cSld>
+  <p:clrMapOvr>
+    <a:masterClrMapping/>
+  </p:clrMapOvr>
+</p:sld>
+</file>
+
+<file path=ppt/slides/slide7.xml><?xml version="1.0" encoding="utf-8"?>
+<p:sld xmlns:a="http://schemas.openxmlformats.org/drawingml/2006/main" xmlns:r="http://schemas.openxmlformats.org/officeDocument/2006/relationships" xmlns:p="http://schemas.openxmlformats.org/presentationml/2006/main">
+  <p:cSld>
+    <p:spTree>
+      <p:nvGrpSpPr>
+        <p:cNvPr id="1" name=""/>
+        <p:cNvGrpSpPr/>
+        <p:nvPr/>
+      </p:nvGrpSpPr>
+      <p:grpSpPr>
+        <a:xfrm>
+          <a:off x="0" y="0"/>
+          <a:ext cx="0" cy="0"/>
+          <a:chOff x="0" y="0"/>
+          <a:chExt cx="0" cy="0"/>
+        </a:xfrm>
+      </p:grpSpPr>
+      <p:sp>
+        <p:nvSpPr>
+          <p:cNvPr id="5" name="Rectangle 4">
+            <a:extLst>
+              <a:ext uri="{FF2B5EF4-FFF2-40B4-BE49-F238E27FC236}">
+                <a16:creationId xmlns:a16="http://schemas.microsoft.com/office/drawing/2014/main" id="{EDC80090-427D-472F-B159-13E453D077AD}"/>
+              </a:ext>
+            </a:extLst>
+          </p:cNvPr>
+          <p:cNvSpPr/>
+          <p:nvPr/>
+        </p:nvSpPr>
+        <p:spPr>
+          <a:xfrm>
+            <a:off x="2150150" y="-12680"/>
+            <a:ext cx="6858000" cy="6858000"/>
+          </a:xfrm>
+          <a:prstGeom prst="rect">
+            <a:avLst/>
+          </a:prstGeom>
+          <a:noFill/>
+          <a:ln>
+            <a:noFill/>
+          </a:ln>
+        </p:spPr>
+        <p:style>
+          <a:lnRef idx="2">
+            <a:schemeClr val="accent1">
+              <a:shade val="50000"/>
+            </a:schemeClr>
+          </a:lnRef>
+          <a:fillRef idx="1">
+            <a:schemeClr val="accent1"/>
+          </a:fillRef>
+          <a:effectRef idx="0">
+            <a:schemeClr val="accent1"/>
+          </a:effectRef>
+          <a:fontRef idx="minor">
+            <a:schemeClr val="lt1"/>
+          </a:fontRef>
+        </p:style>
+        <p:txBody>
+          <a:bodyPr rtlCol="0" anchor="ctr"/>
+          <a:lstStyle/>
+          <a:p>
+            <a:pPr algn="ctr"/>
+            <a:endParaRPr lang="en-PH"/>
+          </a:p>
+        </p:txBody>
+      </p:sp>
+      <p:sp>
+        <p:nvSpPr>
+          <p:cNvPr id="10" name="Parallelogram 9">
+            <a:extLst>
+              <a:ext uri="{FF2B5EF4-FFF2-40B4-BE49-F238E27FC236}">
+                <a16:creationId xmlns:a16="http://schemas.microsoft.com/office/drawing/2014/main" id="{A89FDD28-6649-491E-9EFF-F3AF1EFA9C14}"/>
+              </a:ext>
+            </a:extLst>
+          </p:cNvPr>
+          <p:cNvSpPr/>
+          <p:nvPr/>
+        </p:nvSpPr>
+        <p:spPr>
+          <a:xfrm>
+            <a:off x="3029562" y="3015121"/>
+            <a:ext cx="6132876" cy="783007"/>
+          </a:xfrm>
+          <a:prstGeom prst="parallelogram">
+            <a:avLst/>
+          </a:prstGeom>
+          <a:solidFill>
+            <a:srgbClr val="9794BF"/>
+          </a:solidFill>
+          <a:ln>
+            <a:noFill/>
+          </a:ln>
+        </p:spPr>
+        <p:style>
+          <a:lnRef idx="2">
+            <a:schemeClr val="accent1">
+              <a:shade val="50000"/>
+            </a:schemeClr>
+          </a:lnRef>
+          <a:fillRef idx="1">
+            <a:schemeClr val="accent1"/>
+          </a:fillRef>
+          <a:effectRef idx="0">
+            <a:schemeClr val="accent1"/>
+          </a:effectRef>
+          <a:fontRef idx="minor">
+            <a:schemeClr val="lt1"/>
+          </a:fontRef>
+        </p:style>
+        <p:txBody>
+          <a:bodyPr rtlCol="0" anchor="ctr"/>
+          <a:lstStyle/>
+          <a:p>
+            <a:pPr algn="ctr"/>
+            <a:endParaRPr lang="en-PH"/>
+          </a:p>
+        </p:txBody>
+      </p:sp>
+      <p:sp>
+        <p:nvSpPr>
+          <p:cNvPr id="11" name="Rectangle 10">
+            <a:extLst>
+              <a:ext uri="{FF2B5EF4-FFF2-40B4-BE49-F238E27FC236}">
+                <a16:creationId xmlns:a16="http://schemas.microsoft.com/office/drawing/2014/main" id="{7FC8E1EB-68A2-4CCA-867F-DE4DA42667FA}"/>
+              </a:ext>
+            </a:extLst>
+          </p:cNvPr>
+          <p:cNvSpPr/>
+          <p:nvPr/>
+        </p:nvSpPr>
+        <p:spPr>
+          <a:xfrm>
+            <a:off x="-1120309" y="429108"/>
+            <a:ext cx="15042259" cy="923330"/>
+          </a:xfrm>
+          <a:prstGeom prst="rect">
+            <a:avLst/>
+          </a:prstGeom>
+          <a:noFill/>
+        </p:spPr>
+        <p:txBody>
+          <a:bodyPr wrap="none" lIns="91440" tIns="45720" rIns="91440" bIns="45720">
+            <a:spAutoFit/>
+          </a:bodyPr>
+          <a:lstStyle/>
+          <a:p>
+            <a:pPr algn="ctr"/>
+            <a:r>
+              <a:rPr lang="en-US" sz="5400" b="0" cap="none" spc="0" dirty="0">
+                <a:ln w="0"/>
+                <a:solidFill>
+                  <a:schemeClr val="bg1"/>
+                </a:solidFill>
+                <a:effectLst>
+                  <a:outerShdw blurRad="38100" dist="19050" dir="2700000" algn="tl" rotWithShape="0">
+                    <a:schemeClr val="dk1">
+                      <a:alpha val="40000"/>
+                    </a:schemeClr>
+                  </a:outerShdw>
+                </a:effectLst>
+                <a:latin typeface="Arial Black" panose="020B0A04020102020204" pitchFamily="34" charset="0"/>
+              </a:rPr>
+              <a:t>AS A PROJECT MANAGEMENT CENTER</a:t>
+            </a:r>
+          </a:p>
+        </p:txBody>
+      </p:sp>
+      <p:sp>
+        <p:nvSpPr>
+          <p:cNvPr id="13" name="TextBox 12">
+            <a:extLst>
+              <a:ext uri="{FF2B5EF4-FFF2-40B4-BE49-F238E27FC236}">
+                <a16:creationId xmlns:a16="http://schemas.microsoft.com/office/drawing/2014/main" id="{066EC97D-4911-4D7C-B645-80A61F380F2A}"/>
+              </a:ext>
+            </a:extLst>
+          </p:cNvPr>
+          <p:cNvSpPr txBox="1"/>
+          <p:nvPr/>
+        </p:nvSpPr>
+        <p:spPr>
+          <a:xfrm>
+            <a:off x="2858826" y="3776983"/>
+            <a:ext cx="6474348" cy="3970318"/>
+          </a:xfrm>
+          <a:prstGeom prst="rect">
+            <a:avLst/>
+          </a:prstGeom>
+          <a:noFill/>
+        </p:spPr>
+        <p:txBody>
+          <a:bodyPr wrap="square" rtlCol="0">
+            <a:spAutoFit/>
+          </a:bodyPr>
+          <a:lstStyle/>
+          <a:p>
+            <a:pPr algn="ctr"/>
+            <a:r>
+              <a:rPr lang="en-PH" sz="3600" dirty="0"/>
+              <a:t>The CNB lends its technical expertise to national government offices in the preparation and improving project proposals. CNB also assists legislators in the analysis and scrutiny of the general appropriations bill.</a:t>
+            </a:r>
+          </a:p>
+        </p:txBody>
+      </p:sp>
+      <p:sp>
+        <p:nvSpPr>
+          <p:cNvPr id="6" name="Oval 5">
+            <a:extLst>
+              <a:ext uri="{FF2B5EF4-FFF2-40B4-BE49-F238E27FC236}">
+                <a16:creationId xmlns:a16="http://schemas.microsoft.com/office/drawing/2014/main" id="{B1AE4BB8-C265-4E9C-ABC7-44010C5E6FB2}"/>
+              </a:ext>
+            </a:extLst>
+          </p:cNvPr>
+          <p:cNvSpPr/>
+          <p:nvPr/>
+        </p:nvSpPr>
+        <p:spPr>
+          <a:xfrm>
+            <a:off x="4953000" y="429108"/>
+            <a:ext cx="2286000" cy="2286000"/>
+          </a:xfrm>
+          <a:prstGeom prst="ellipse">
+            <a:avLst/>
+          </a:prstGeom>
+          <a:solidFill>
+            <a:schemeClr val="bg1"/>
+          </a:solidFill>
+          <a:ln w="152400">
+            <a:solidFill>
+              <a:srgbClr val="9794BF"/>
+            </a:solidFill>
+          </a:ln>
+        </p:spPr>
+        <p:style>
+          <a:lnRef idx="2">
+            <a:schemeClr val="accent1">
+              <a:shade val="50000"/>
+            </a:schemeClr>
+          </a:lnRef>
+          <a:fillRef idx="1">
+            <a:schemeClr val="accent1"/>
+          </a:fillRef>
+          <a:effectRef idx="0">
+            <a:schemeClr val="accent1"/>
+          </a:effectRef>
+          <a:fontRef idx="minor">
+            <a:schemeClr val="lt1"/>
+          </a:fontRef>
+        </p:style>
+        <p:txBody>
+          <a:bodyPr rtlCol="0" anchor="ctr"/>
+          <a:lstStyle/>
+          <a:p>
+            <a:pPr algn="ctr"/>
+            <a:endParaRPr lang="en-PH"/>
+          </a:p>
+        </p:txBody>
+      </p:sp>
+      <p:pic>
+        <p:nvPicPr>
+          <p:cNvPr id="22" name="Picture 21">
+            <a:extLst>
+              <a:ext uri="{FF2B5EF4-FFF2-40B4-BE49-F238E27FC236}">
+                <a16:creationId xmlns:a16="http://schemas.microsoft.com/office/drawing/2014/main" id="{9DF4CF1B-E2E6-4F36-A42D-D976EABADBE2}"/>
+              </a:ext>
+            </a:extLst>
+          </p:cNvPr>
+          <p:cNvPicPr>
+            <a:picLocks noChangeAspect="1"/>
+          </p:cNvPicPr>
+          <p:nvPr/>
+        </p:nvPicPr>
+        <p:blipFill rotWithShape="1">
+          <a:blip r:embed="rId2">
+            <a:extLst>
+              <a:ext uri="{28A0092B-C50C-407E-A947-70E740481C1C}">
+                <a14:useLocalDpi xmlns:a14="http://schemas.microsoft.com/office/drawing/2010/main" val="0"/>
+              </a:ext>
+            </a:extLst>
+          </a:blip>
+          <a:srcRect l="798" t="41150" r="85638" b="46626"/>
+          <a:stretch/>
+        </p:blipFill>
+        <p:spPr>
+          <a:xfrm>
+            <a:off x="983909" y="1632088"/>
+            <a:ext cx="1682434" cy="1083020"/>
+          </a:xfrm>
+          <a:prstGeom prst="rect">
+            <a:avLst/>
+          </a:prstGeom>
+        </p:spPr>
+      </p:pic>
+      <p:pic>
+        <p:nvPicPr>
+          <p:cNvPr id="23" name="Picture 22">
+            <a:extLst>
+              <a:ext uri="{FF2B5EF4-FFF2-40B4-BE49-F238E27FC236}">
+                <a16:creationId xmlns:a16="http://schemas.microsoft.com/office/drawing/2014/main" id="{4B6EF4E1-7497-4C3A-8241-D0BB4F5A8310}"/>
+              </a:ext>
+            </a:extLst>
+          </p:cNvPr>
+          <p:cNvPicPr>
+            <a:picLocks noChangeAspect="1"/>
+          </p:cNvPicPr>
+          <p:nvPr/>
+        </p:nvPicPr>
+        <p:blipFill>
+          <a:blip r:embed="rId3"/>
+          <a:stretch>
+            <a:fillRect/>
+          </a:stretch>
+        </p:blipFill>
+        <p:spPr>
+          <a:xfrm>
+            <a:off x="4356251" y="2715108"/>
+            <a:ext cx="8131342" cy="1184475"/>
+          </a:xfrm>
+          <a:prstGeom prst="rect">
+            <a:avLst/>
+          </a:prstGeom>
+        </p:spPr>
+      </p:pic>
+      <p:pic>
+        <p:nvPicPr>
+          <p:cNvPr id="24" name="Picture 23">
+            <a:extLst>
+              <a:ext uri="{FF2B5EF4-FFF2-40B4-BE49-F238E27FC236}">
+                <a16:creationId xmlns:a16="http://schemas.microsoft.com/office/drawing/2014/main" id="{20DE1413-A1E8-413D-8053-FCE94B3300B3}"/>
+              </a:ext>
+            </a:extLst>
+          </p:cNvPr>
+          <p:cNvPicPr>
+            <a:picLocks noChangeAspect="1"/>
+          </p:cNvPicPr>
+          <p:nvPr/>
+        </p:nvPicPr>
+        <p:blipFill>
+          <a:blip r:embed="rId4"/>
+          <a:stretch>
+            <a:fillRect/>
+          </a:stretch>
+        </p:blipFill>
+        <p:spPr>
+          <a:xfrm>
+            <a:off x="2669751" y="1298263"/>
+            <a:ext cx="6852498" cy="4261473"/>
+          </a:xfrm>
+          <a:prstGeom prst="rect">
+            <a:avLst/>
+          </a:prstGeom>
+        </p:spPr>
+      </p:pic>
+    </p:spTree>
+    <p:extLst>
+      <p:ext uri="{BB962C8B-B14F-4D97-AF65-F5344CB8AC3E}">
+        <p14:creationId xmlns:p14="http://schemas.microsoft.com/office/powerpoint/2010/main" val="3085513472"/>
+      </p:ext>
+    </p:extLst>
+  </p:cSld>
+  <p:clrMapOvr>
+    <a:masterClrMapping/>
+  </p:clrMapOvr>
+</p:sld>
+</file>
+
+<file path=ppt/slides/slide8.xml><?xml version="1.0" encoding="utf-8"?>
+<p:sld xmlns:a="http://schemas.openxmlformats.org/drawingml/2006/main" xmlns:r="http://schemas.openxmlformats.org/officeDocument/2006/relationships" xmlns:p="http://schemas.openxmlformats.org/presentationml/2006/main">
+  <p:cSld>
+    <p:spTree>
+      <p:nvGrpSpPr>
+        <p:cNvPr id="1" name=""/>
+        <p:cNvGrpSpPr/>
+        <p:nvPr/>
+      </p:nvGrpSpPr>
+      <p:grpSpPr>
+        <a:xfrm>
+          <a:off x="0" y="0"/>
+          <a:ext cx="0" cy="0"/>
+          <a:chOff x="0" y="0"/>
+          <a:chExt cx="0" cy="0"/>
+        </a:xfrm>
+      </p:grpSpPr>
+      <p:sp>
+        <p:nvSpPr>
+          <p:cNvPr id="5" name="Rectangle 4">
+            <a:extLst>
+              <a:ext uri="{FF2B5EF4-FFF2-40B4-BE49-F238E27FC236}">
+                <a16:creationId xmlns:a16="http://schemas.microsoft.com/office/drawing/2014/main" id="{EDC80090-427D-472F-B159-13E453D077AD}"/>
+              </a:ext>
+            </a:extLst>
+          </p:cNvPr>
+          <p:cNvSpPr/>
+          <p:nvPr/>
+        </p:nvSpPr>
+        <p:spPr>
+          <a:xfrm>
+            <a:off x="2667000" y="0"/>
+            <a:ext cx="6858000" cy="6858000"/>
+          </a:xfrm>
+          <a:prstGeom prst="rect">
+            <a:avLst/>
+          </a:prstGeom>
+          <a:noFill/>
+          <a:ln>
+            <a:noFill/>
+          </a:ln>
+        </p:spPr>
+        <p:style>
+          <a:lnRef idx="2">
+            <a:schemeClr val="accent1">
+              <a:shade val="50000"/>
+            </a:schemeClr>
+          </a:lnRef>
+          <a:fillRef idx="1">
+            <a:schemeClr val="accent1"/>
+          </a:fillRef>
+          <a:effectRef idx="0">
+            <a:schemeClr val="accent1"/>
+          </a:effectRef>
+          <a:fontRef idx="minor">
+            <a:schemeClr val="lt1"/>
+          </a:fontRef>
+        </p:style>
+        <p:txBody>
+          <a:bodyPr rtlCol="0" anchor="ctr"/>
+          <a:lstStyle/>
+          <a:p>
+            <a:pPr algn="ctr"/>
+            <a:endParaRPr lang="en-PH"/>
+          </a:p>
+        </p:txBody>
+      </p:sp>
+      <p:sp>
+        <p:nvSpPr>
+          <p:cNvPr id="10" name="Parallelogram 9">
+            <a:extLst>
+              <a:ext uri="{FF2B5EF4-FFF2-40B4-BE49-F238E27FC236}">
+                <a16:creationId xmlns:a16="http://schemas.microsoft.com/office/drawing/2014/main" id="{A89FDD28-6649-491E-9EFF-F3AF1EFA9C14}"/>
+              </a:ext>
+            </a:extLst>
+          </p:cNvPr>
+          <p:cNvSpPr/>
+          <p:nvPr/>
+        </p:nvSpPr>
+        <p:spPr>
+          <a:xfrm>
+            <a:off x="3029562" y="3015121"/>
+            <a:ext cx="6132876" cy="783007"/>
+          </a:xfrm>
+          <a:prstGeom prst="parallelogram">
+            <a:avLst/>
+          </a:prstGeom>
+          <a:solidFill>
+            <a:srgbClr val="9794BF"/>
+          </a:solidFill>
+          <a:ln>
+            <a:noFill/>
+          </a:ln>
+        </p:spPr>
+        <p:style>
+          <a:lnRef idx="2">
+            <a:schemeClr val="accent1">
+              <a:shade val="50000"/>
+            </a:schemeClr>
+          </a:lnRef>
+          <a:fillRef idx="1">
+            <a:schemeClr val="accent1"/>
+          </a:fillRef>
+          <a:effectRef idx="0">
+            <a:schemeClr val="accent1"/>
+          </a:effectRef>
+          <a:fontRef idx="minor">
+            <a:schemeClr val="lt1"/>
+          </a:fontRef>
+        </p:style>
+        <p:txBody>
+          <a:bodyPr rtlCol="0" anchor="ctr"/>
+          <a:lstStyle/>
+          <a:p>
+            <a:pPr algn="ctr"/>
+            <a:endParaRPr lang="en-PH"/>
+          </a:p>
+        </p:txBody>
+      </p:sp>
+      <p:pic>
+        <p:nvPicPr>
+          <p:cNvPr id="23" name="Picture 22">
+            <a:extLst>
+              <a:ext uri="{FF2B5EF4-FFF2-40B4-BE49-F238E27FC236}">
+                <a16:creationId xmlns:a16="http://schemas.microsoft.com/office/drawing/2014/main" id="{4B6EF4E1-7497-4C3A-8241-D0BB4F5A8310}"/>
+              </a:ext>
+            </a:extLst>
+          </p:cNvPr>
+          <p:cNvPicPr>
+            <a:picLocks noChangeAspect="1"/>
+          </p:cNvPicPr>
+          <p:nvPr/>
+        </p:nvPicPr>
+        <p:blipFill>
+          <a:blip r:embed="rId2"/>
+          <a:stretch>
+            <a:fillRect/>
+          </a:stretch>
+        </p:blipFill>
+        <p:spPr>
+          <a:xfrm>
+            <a:off x="3106706" y="2928202"/>
+            <a:ext cx="5978588" cy="1184475"/>
+          </a:xfrm>
+          <a:prstGeom prst="rect">
+            <a:avLst/>
+          </a:prstGeom>
+        </p:spPr>
+      </p:pic>
+      <p:pic>
+        <p:nvPicPr>
+          <p:cNvPr id="24" name="Picture 23">
+            <a:extLst>
+              <a:ext uri="{FF2B5EF4-FFF2-40B4-BE49-F238E27FC236}">
+                <a16:creationId xmlns:a16="http://schemas.microsoft.com/office/drawing/2014/main" id="{20DE1413-A1E8-413D-8053-FCE94B3300B3}"/>
+              </a:ext>
+            </a:extLst>
+          </p:cNvPr>
+          <p:cNvPicPr>
+            <a:picLocks noChangeAspect="1"/>
+          </p:cNvPicPr>
+          <p:nvPr/>
+        </p:nvPicPr>
+        <p:blipFill>
+          <a:blip r:embed="rId3"/>
+          <a:stretch>
+            <a:fillRect/>
+          </a:stretch>
+        </p:blipFill>
+        <p:spPr>
+          <a:xfrm>
+            <a:off x="3068245" y="3692630"/>
+            <a:ext cx="6017049" cy="3239609"/>
+          </a:xfrm>
+          <a:prstGeom prst="rect">
+            <a:avLst/>
+          </a:prstGeom>
+        </p:spPr>
+      </p:pic>
+      <p:grpSp>
+        <p:nvGrpSpPr>
+          <p:cNvPr id="9" name="Group 8">
+            <a:extLst>
+              <a:ext uri="{FF2B5EF4-FFF2-40B4-BE49-F238E27FC236}">
+                <a16:creationId xmlns:a16="http://schemas.microsoft.com/office/drawing/2014/main" id="{3BA84DF3-796E-4A0B-AEC0-6E98D85C0AB8}"/>
+              </a:ext>
+            </a:extLst>
+          </p:cNvPr>
+          <p:cNvGrpSpPr/>
+          <p:nvPr/>
+        </p:nvGrpSpPr>
+        <p:grpSpPr>
+          <a:xfrm>
+            <a:off x="4953000" y="429108"/>
+            <a:ext cx="2286000" cy="2286000"/>
+            <a:chOff x="4953000" y="429108"/>
+            <a:chExt cx="2286000" cy="2286000"/>
+          </a:xfrm>
+        </p:grpSpPr>
+        <p:sp>
+          <p:nvSpPr>
+            <p:cNvPr id="6" name="Oval 5">
+              <a:extLst>
+                <a:ext uri="{FF2B5EF4-FFF2-40B4-BE49-F238E27FC236}">
+                  <a16:creationId xmlns:a16="http://schemas.microsoft.com/office/drawing/2014/main" id="{B1AE4BB8-C265-4E9C-ABC7-44010C5E6FB2}"/>
+                </a:ext>
+              </a:extLst>
+            </p:cNvPr>
+            <p:cNvSpPr/>
+            <p:nvPr/>
+          </p:nvSpPr>
+          <p:spPr>
+            <a:xfrm>
+              <a:off x="4953000" y="429108"/>
+              <a:ext cx="2286000" cy="2286000"/>
+            </a:xfrm>
+            <a:prstGeom prst="ellipse">
+              <a:avLst/>
+            </a:prstGeom>
+            <a:solidFill>
+              <a:schemeClr val="bg1"/>
+            </a:solidFill>
+            <a:ln w="152400">
+              <a:solidFill>
+                <a:schemeClr val="bg1"/>
+              </a:solidFill>
+            </a:ln>
+          </p:spPr>
+          <p:style>
+            <a:lnRef idx="2">
+              <a:schemeClr val="accent1">
+                <a:shade val="50000"/>
+              </a:schemeClr>
+            </a:lnRef>
+            <a:fillRef idx="1">
+              <a:schemeClr val="accent1"/>
+            </a:fillRef>
+            <a:effectRef idx="0">
+              <a:schemeClr val="accent1"/>
+            </a:effectRef>
+            <a:fontRef idx="minor">
+              <a:schemeClr val="lt1"/>
+            </a:fontRef>
+          </p:style>
+          <p:txBody>
+            <a:bodyPr rtlCol="0" anchor="ctr"/>
+            <a:lstStyle/>
+            <a:p>
+              <a:pPr algn="ctr"/>
+              <a:endParaRPr lang="en-PH"/>
+            </a:p>
+          </p:txBody>
+        </p:sp>
+        <p:grpSp>
+          <p:nvGrpSpPr>
+            <p:cNvPr id="8" name="Group 7">
+              <a:extLst>
+                <a:ext uri="{FF2B5EF4-FFF2-40B4-BE49-F238E27FC236}">
+                  <a16:creationId xmlns:a16="http://schemas.microsoft.com/office/drawing/2014/main" id="{B27472EB-F74F-40DD-B09F-DA18CAF69AAB}"/>
+                </a:ext>
+              </a:extLst>
+            </p:cNvPr>
+            <p:cNvGrpSpPr/>
+            <p:nvPr/>
+          </p:nvGrpSpPr>
+          <p:grpSpPr>
+            <a:xfrm>
+              <a:off x="4953000" y="429108"/>
+              <a:ext cx="2286000" cy="2286000"/>
+              <a:chOff x="4953000" y="429108"/>
+              <a:chExt cx="2286000" cy="2286000"/>
+            </a:xfrm>
+          </p:grpSpPr>
+          <p:pic>
+            <p:nvPicPr>
+              <p:cNvPr id="7" name="Picture 6">
+                <a:extLst>
+                  <a:ext uri="{FF2B5EF4-FFF2-40B4-BE49-F238E27FC236}">
+                    <a16:creationId xmlns:a16="http://schemas.microsoft.com/office/drawing/2014/main" id="{60EA04C4-24B9-452A-AADE-3AB8E9175331}"/>
+                  </a:ext>
+                </a:extLst>
+              </p:cNvPr>
+              <p:cNvPicPr>
+                <a:picLocks noChangeAspect="1"/>
+              </p:cNvPicPr>
+              <p:nvPr/>
+            </p:nvPicPr>
+            <p:blipFill>
+              <a:blip r:embed="rId4"/>
+              <a:stretch>
+                <a:fillRect/>
+              </a:stretch>
+            </p:blipFill>
+            <p:spPr>
+              <a:xfrm>
+                <a:off x="5113106" y="742734"/>
+                <a:ext cx="1948094" cy="1662750"/>
+              </a:xfrm>
+              <a:prstGeom prst="rect">
+                <a:avLst/>
+              </a:prstGeom>
+            </p:spPr>
+          </p:pic>
+          <p:sp>
+            <p:nvSpPr>
+              <p:cNvPr id="17" name="Oval 16">
+                <a:extLst>
+                  <a:ext uri="{FF2B5EF4-FFF2-40B4-BE49-F238E27FC236}">
+                    <a16:creationId xmlns:a16="http://schemas.microsoft.com/office/drawing/2014/main" id="{2198EB09-96A6-4D98-AC4D-A8EAB37A557C}"/>
+                  </a:ext>
+                </a:extLst>
+              </p:cNvPr>
+              <p:cNvSpPr/>
+              <p:nvPr/>
+            </p:nvSpPr>
+            <p:spPr>
+              <a:xfrm>
+                <a:off x="4953000" y="429108"/>
+                <a:ext cx="2286000" cy="2286000"/>
+              </a:xfrm>
+              <a:prstGeom prst="ellipse">
+                <a:avLst/>
+              </a:prstGeom>
+              <a:noFill/>
+              <a:ln w="152400">
+                <a:solidFill>
+                  <a:srgbClr val="9794BF"/>
+                </a:solidFill>
+              </a:ln>
+            </p:spPr>
+            <p:style>
+              <a:lnRef idx="2">
+                <a:schemeClr val="accent1">
+                  <a:shade val="50000"/>
+                </a:schemeClr>
+              </a:lnRef>
+              <a:fillRef idx="1">
+                <a:schemeClr val="accent1"/>
+              </a:fillRef>
+              <a:effectRef idx="0">
+                <a:schemeClr val="accent1"/>
+              </a:effectRef>
+              <a:fontRef idx="minor">
+                <a:schemeClr val="lt1"/>
+              </a:fontRef>
+            </p:style>
+            <p:txBody>
+              <a:bodyPr rtlCol="0" anchor="ctr"/>
+              <a:lstStyle/>
+              <a:p>
+                <a:pPr algn="ctr"/>
+                <a:endParaRPr lang="en-PH"/>
+              </a:p>
+            </p:txBody>
+          </p:sp>
+        </p:grpSp>
+      </p:grpSp>
+    </p:spTree>
+    <p:extLst>
+      <p:ext uri="{BB962C8B-B14F-4D97-AF65-F5344CB8AC3E}">
+        <p14:creationId xmlns:p14="http://schemas.microsoft.com/office/powerpoint/2010/main" val="4093653896"/>
+      </p:ext>
+    </p:extLst>
+  </p:cSld>
+  <p:clrMapOvr>
+    <a:masterClrMapping/>
+  </p:clrMapOvr>
+</p:sld>
+</file>
+
+<file path=ppt/slides/slide9.xml><?xml version="1.0" encoding="utf-8"?>
+<p:sld xmlns:a="http://schemas.openxmlformats.org/drawingml/2006/main" xmlns:r="http://schemas.openxmlformats.org/officeDocument/2006/relationships" xmlns:p="http://schemas.openxmlformats.org/presentationml/2006/main">
+  <p:cSld>
+    <p:spTree>
+      <p:nvGrpSpPr>
+        <p:cNvPr id="1" name=""/>
+        <p:cNvGrpSpPr/>
+        <p:nvPr/>
+      </p:nvGrpSpPr>
+      <p:grpSpPr>
+        <a:xfrm>
+          <a:off x="0" y="0"/>
+          <a:ext cx="0" cy="0"/>
+          <a:chOff x="0" y="0"/>
+          <a:chExt cx="0" cy="0"/>
+        </a:xfrm>
+      </p:grpSpPr>
+      <p:sp>
+        <p:nvSpPr>
+          <p:cNvPr id="5" name="Rectangle 4">
+            <a:extLst>
+              <a:ext uri="{FF2B5EF4-FFF2-40B4-BE49-F238E27FC236}">
+                <a16:creationId xmlns:a16="http://schemas.microsoft.com/office/drawing/2014/main" id="{EDC80090-427D-472F-B159-13E453D077AD}"/>
+              </a:ext>
+            </a:extLst>
+          </p:cNvPr>
+          <p:cNvSpPr/>
+          <p:nvPr/>
+        </p:nvSpPr>
+        <p:spPr>
+          <a:xfrm>
+            <a:off x="2667000" y="-22376"/>
+            <a:ext cx="6858000" cy="6858000"/>
+          </a:xfrm>
+          <a:prstGeom prst="rect">
+            <a:avLst/>
+          </a:prstGeom>
+          <a:noFill/>
+          <a:ln>
+            <a:noFill/>
+          </a:ln>
+        </p:spPr>
+        <p:style>
+          <a:lnRef idx="2">
+            <a:schemeClr val="accent1">
+              <a:shade val="50000"/>
+            </a:schemeClr>
+          </a:lnRef>
+          <a:fillRef idx="1">
+            <a:schemeClr val="accent1"/>
+          </a:fillRef>
+          <a:effectRef idx="0">
+            <a:schemeClr val="accent1"/>
+          </a:effectRef>
+          <a:fontRef idx="minor">
+            <a:schemeClr val="lt1"/>
+          </a:fontRef>
+        </p:style>
+        <p:txBody>
+          <a:bodyPr rtlCol="0" anchor="ctr"/>
+          <a:lstStyle/>
+          <a:p>
+            <a:pPr algn="ctr"/>
+            <a:endParaRPr lang="en-PH"/>
+          </a:p>
+        </p:txBody>
+      </p:sp>
+      <p:sp>
+        <p:nvSpPr>
+          <p:cNvPr id="10" name="Parallelogram 9">
+            <a:extLst>
+              <a:ext uri="{FF2B5EF4-FFF2-40B4-BE49-F238E27FC236}">
+                <a16:creationId xmlns:a16="http://schemas.microsoft.com/office/drawing/2014/main" id="{A89FDD28-6649-491E-9EFF-F3AF1EFA9C14}"/>
+              </a:ext>
+            </a:extLst>
+          </p:cNvPr>
+          <p:cNvSpPr/>
+          <p:nvPr/>
+        </p:nvSpPr>
+        <p:spPr>
+          <a:xfrm>
+            <a:off x="3029562" y="3015121"/>
+            <a:ext cx="6132876" cy="783007"/>
+          </a:xfrm>
+          <a:prstGeom prst="parallelogram">
+            <a:avLst/>
+          </a:prstGeom>
+          <a:solidFill>
+            <a:srgbClr val="F79530"/>
+          </a:solidFill>
+          <a:ln>
+            <a:noFill/>
+          </a:ln>
+        </p:spPr>
+        <p:style>
+          <a:lnRef idx="2">
+            <a:schemeClr val="accent1">
+              <a:shade val="50000"/>
+            </a:schemeClr>
+          </a:lnRef>
+          <a:fillRef idx="1">
+            <a:schemeClr val="accent1"/>
+          </a:fillRef>
+          <a:effectRef idx="0">
+            <a:schemeClr val="accent1"/>
+          </a:effectRef>
+          <a:fontRef idx="minor">
+            <a:schemeClr val="lt1"/>
+          </a:fontRef>
+        </p:style>
+        <p:txBody>
+          <a:bodyPr rtlCol="0" anchor="ctr"/>
+          <a:lstStyle/>
+          <a:p>
+            <a:pPr algn="ctr"/>
+            <a:endParaRPr lang="en-PH"/>
+          </a:p>
+        </p:txBody>
+      </p:sp>
+      <p:sp>
+        <p:nvSpPr>
+          <p:cNvPr id="13" name="TextBox 12">
+            <a:extLst>
+              <a:ext uri="{FF2B5EF4-FFF2-40B4-BE49-F238E27FC236}">
+                <a16:creationId xmlns:a16="http://schemas.microsoft.com/office/drawing/2014/main" id="{066EC97D-4911-4D7C-B645-80A61F380F2A}"/>
+              </a:ext>
+            </a:extLst>
+          </p:cNvPr>
+          <p:cNvSpPr txBox="1"/>
+          <p:nvPr/>
+        </p:nvSpPr>
+        <p:spPr>
+          <a:xfrm>
+            <a:off x="2858826" y="3776983"/>
+            <a:ext cx="6474348" cy="1754326"/>
+          </a:xfrm>
+          <a:prstGeom prst="rect">
+            <a:avLst/>
+          </a:prstGeom>
+          <a:noFill/>
+        </p:spPr>
+        <p:txBody>
+          <a:bodyPr wrap="square" rtlCol="0">
+            <a:spAutoFit/>
+          </a:bodyPr>
+          <a:lstStyle/>
+          <a:p>
+            <a:pPr algn="ctr"/>
+            <a:r>
+              <a:rPr lang="en-PH" sz="3600" dirty="0"/>
+              <a:t>CNB produces books and periodicals as well as briefing materials</a:t>
+            </a:r>
+          </a:p>
+        </p:txBody>
+      </p:sp>
+      <p:grpSp>
+        <p:nvGrpSpPr>
+          <p:cNvPr id="2" name="Group 1">
+            <a:extLst>
+              <a:ext uri="{FF2B5EF4-FFF2-40B4-BE49-F238E27FC236}">
+                <a16:creationId xmlns:a16="http://schemas.microsoft.com/office/drawing/2014/main" id="{16A8823E-B058-43EB-A2C2-EDE95D608C2E}"/>
+              </a:ext>
+            </a:extLst>
+          </p:cNvPr>
+          <p:cNvGrpSpPr/>
+          <p:nvPr/>
+        </p:nvGrpSpPr>
+        <p:grpSpPr>
+          <a:xfrm>
+            <a:off x="4953000" y="429108"/>
+            <a:ext cx="2286000" cy="2286000"/>
+            <a:chOff x="4953000" y="429108"/>
+            <a:chExt cx="2286000" cy="2286000"/>
+          </a:xfrm>
+        </p:grpSpPr>
+        <p:sp>
+          <p:nvSpPr>
+            <p:cNvPr id="6" name="Oval 5">
+              <a:extLst>
+                <a:ext uri="{FF2B5EF4-FFF2-40B4-BE49-F238E27FC236}">
+                  <a16:creationId xmlns:a16="http://schemas.microsoft.com/office/drawing/2014/main" id="{B1AE4BB8-C265-4E9C-ABC7-44010C5E6FB2}"/>
+                </a:ext>
+              </a:extLst>
+            </p:cNvPr>
+            <p:cNvSpPr/>
+            <p:nvPr/>
+          </p:nvSpPr>
+          <p:spPr>
+            <a:xfrm>
+              <a:off x="4953000" y="429108"/>
+              <a:ext cx="2286000" cy="2286000"/>
+            </a:xfrm>
+            <a:prstGeom prst="ellipse">
+              <a:avLst/>
+            </a:prstGeom>
+            <a:solidFill>
+              <a:schemeClr val="bg1"/>
+            </a:solidFill>
+            <a:ln w="152400">
+              <a:solidFill>
+                <a:srgbClr val="F79530"/>
+              </a:solidFill>
+            </a:ln>
+          </p:spPr>
+          <p:style>
+            <a:lnRef idx="2">
+              <a:schemeClr val="accent1">
+                <a:shade val="50000"/>
+              </a:schemeClr>
+            </a:lnRef>
+            <a:fillRef idx="1">
+              <a:schemeClr val="accent1"/>
+            </a:fillRef>
+            <a:effectRef idx="0">
+              <a:schemeClr val="accent1"/>
+            </a:effectRef>
+            <a:fontRef idx="minor">
+              <a:schemeClr val="lt1"/>
+            </a:fontRef>
+          </p:style>
+          <p:txBody>
+            <a:bodyPr rtlCol="0" anchor="ctr"/>
+            <a:lstStyle/>
+            <a:p>
+              <a:pPr algn="ctr"/>
+              <a:endParaRPr lang="en-PH"/>
+            </a:p>
+          </p:txBody>
+        </p:sp>
+        <p:pic>
+          <p:nvPicPr>
+            <p:cNvPr id="20" name="Picture 19">
+              <a:extLst>
+                <a:ext uri="{FF2B5EF4-FFF2-40B4-BE49-F238E27FC236}">
+                  <a16:creationId xmlns:a16="http://schemas.microsoft.com/office/drawing/2014/main" id="{EEB3DD4C-7F1E-416F-8870-71F1EEDD8092}"/>
+                </a:ext>
+              </a:extLst>
+            </p:cNvPr>
+            <p:cNvPicPr>
+              <a:picLocks noChangeAspect="1"/>
+            </p:cNvPicPr>
+            <p:nvPr/>
+          </p:nvPicPr>
+          <p:blipFill rotWithShape="1">
+            <a:blip r:embed="rId2">
+              <a:extLst>
+                <a:ext uri="{28A0092B-C50C-407E-A947-70E740481C1C}">
+                  <a14:useLocalDpi xmlns:a14="http://schemas.microsoft.com/office/drawing/2010/main" val="0"/>
+                </a:ext>
+              </a:extLst>
+            </a:blip>
+            <a:srcRect l="39791" t="16889" r="39987" b="62337"/>
+            <a:stretch/>
+          </p:blipFill>
+          <p:spPr>
+            <a:xfrm>
+              <a:off x="5402580" y="919600"/>
+              <a:ext cx="1386840" cy="1424646"/>
+            </a:xfrm>
+            <a:prstGeom prst="rect">
+              <a:avLst/>
+            </a:prstGeom>
+          </p:spPr>
+        </p:pic>
+      </p:grpSp>
+      <p:pic>
+        <p:nvPicPr>
+          <p:cNvPr id="21" name="Picture 20">
+            <a:extLst>
+              <a:ext uri="{FF2B5EF4-FFF2-40B4-BE49-F238E27FC236}">
+                <a16:creationId xmlns:a16="http://schemas.microsoft.com/office/drawing/2014/main" id="{077AD583-9F8B-473E-BA4E-EC09066F92A2}"/>
+              </a:ext>
+            </a:extLst>
+          </p:cNvPr>
+          <p:cNvPicPr>
+            <a:picLocks noChangeAspect="1"/>
+          </p:cNvPicPr>
+          <p:nvPr/>
+        </p:nvPicPr>
+        <p:blipFill>
+          <a:blip r:embed="rId3"/>
+          <a:stretch>
+            <a:fillRect/>
+          </a:stretch>
+        </p:blipFill>
+        <p:spPr>
+          <a:xfrm>
+            <a:off x="2957209" y="2785175"/>
+            <a:ext cx="6188940" cy="1518036"/>
+          </a:xfrm>
+          <a:prstGeom prst="rect">
+            <a:avLst/>
+          </a:prstGeom>
+        </p:spPr>
+      </p:pic>
+    </p:spTree>
+    <p:extLst>
+      <p:ext uri="{BB962C8B-B14F-4D97-AF65-F5344CB8AC3E}">
+        <p14:creationId xmlns:p14="http://schemas.microsoft.com/office/powerpoint/2010/main" val="1317607076"/>
       </p:ext>
     </p:extLst>
   </p:cSld>
